--- a/Review 2.pptx
+++ b/Review 2.pptx
@@ -295,7 +295,7 @@
             <a:srgbClr val="A4A3A4"/>
           </p15:clr>
         </p15:guide>
-        <p15:guide id="2" pos="2802" userDrawn="1">
+        <p15:guide id="2" pos="2762" userDrawn="1">
           <p15:clr>
             <a:srgbClr val="A4A3A4"/>
           </p15:clr>
@@ -8209,7 +8209,7 @@
                 <a:latin typeface="Comic Sans MS" panose="030F0702030302020204" charset="0"/>
                 <a:cs typeface="Comic Sans MS" panose="030F0702030302020204" charset="0"/>
               </a:rPr>
-              <a:t>Date: 27/01/2025</a:t>
+              <a:t>Date: 28/01/2025</a:t>
             </a:r>
             <a:endParaRPr lang="en-US">
               <a:solidFill>
@@ -9252,7 +9252,7 @@
                 <a:latin typeface="Comic Sans MS" panose="030F0702030302020204" charset="0"/>
                 <a:cs typeface="Comic Sans MS" panose="030F0702030302020204" charset="0"/>
               </a:rPr>
-              <a:t>3. Database – MongoDB, Mongoose</a:t>
+              <a:t>3. Database – MongoDB, Mongoose:</a:t>
             </a:r>
             <a:endParaRPr lang="en-US" altLang="en-US" sz="1800" b="1" u="sng">
               <a:latin typeface="Comic Sans MS" panose="030F0702030302020204" charset="0"/>
@@ -9463,7 +9463,7 @@
                 <a:latin typeface="Comic Sans MS" panose="030F0702030302020204" charset="0"/>
                 <a:cs typeface="Comic Sans MS" panose="030F0702030302020204" charset="0"/>
               </a:rPr>
-              <a:t>4. Dotenv</a:t>
+              <a:t>4. Dotenv:</a:t>
             </a:r>
             <a:endParaRPr lang="en-US" altLang="en-US" sz="1800" b="1" u="sng">
               <a:latin typeface="Comic Sans MS" panose="030F0702030302020204" charset="0"/>
@@ -9517,7 +9517,7 @@
                 <a:latin typeface="Comic Sans MS" panose="030F0702030302020204" charset="0"/>
                 <a:cs typeface="Comic Sans MS" panose="030F0702030302020204" charset="0"/>
               </a:rPr>
-              <a:t>5. Axios </a:t>
+              <a:t>5. Axios:</a:t>
             </a:r>
             <a:endParaRPr lang="en-US" altLang="en-US" sz="1800" b="1" u="sng">
               <a:latin typeface="Comic Sans MS" panose="030F0702030302020204" charset="0"/>
@@ -9982,7 +9982,7 @@
             </a:endParaRPr>
           </a:p>
           <a:p>
-            <a:pPr lvl="0" algn="l" rtl="0">
+            <a:pPr marL="114300" lvl="0" indent="0" algn="l" rtl="0">
               <a:lnSpc>
                 <a:spcPct val="150000"/>
               </a:lnSpc>
@@ -9994,7 +9994,7 @@
               </a:spcAft>
               <a:buSzPts val="1800"/>
               <a:buFont typeface="Wingdings" panose="05000000000000000000" charset="0"/>
-              <a:buChar char="q"/>
+              <a:buNone/>
             </a:pPr>
             <a:r>
               <a:rPr lang="en-US" altLang="en-US" sz="1800">
@@ -10420,7 +10420,7 @@
         <p:spPr>
           <a:xfrm>
             <a:off x="484505" y="1127125"/>
-            <a:ext cx="3442970" cy="3779520"/>
+            <a:ext cx="3442970" cy="3459480"/>
           </a:xfrm>
           <a:prstGeom prst="rect">
             <a:avLst/>
@@ -10446,14 +10446,7 @@
               <a:buFont typeface="Wingdings" panose="05000000000000000000" charset="0"/>
               <a:buChar char="q"/>
             </a:pPr>
-            <a:r>
-              <a:rPr lang="en-GB" sz="1800">
-                <a:latin typeface="Comic Sans MS" panose="030F0702030302020204" charset="0"/>
-                <a:cs typeface="Comic Sans MS" panose="030F0702030302020204" charset="0"/>
-              </a:rPr>
-              <a:t>Introduction</a:t>
-            </a:r>
-            <a:endParaRPr lang="en-GB" sz="1800">
+            <a:endParaRPr lang="en-GB" sz="2000">
               <a:latin typeface="Comic Sans MS" panose="030F0702030302020204" charset="0"/>
               <a:cs typeface="Comic Sans MS" panose="030F0702030302020204" charset="0"/>
             </a:endParaRPr>
@@ -10474,13 +10467,13 @@
               <a:buChar char="q"/>
             </a:pPr>
             <a:r>
-              <a:rPr lang="en-US" altLang="en-GB" sz="1800">
+              <a:rPr lang="en-GB" sz="2000">
                 <a:latin typeface="Comic Sans MS" panose="030F0702030302020204" charset="0"/>
                 <a:cs typeface="Comic Sans MS" panose="030F0702030302020204" charset="0"/>
               </a:rPr>
-              <a:t>Gaps identified</a:t>
+              <a:t>Introduction</a:t>
             </a:r>
-            <a:endParaRPr lang="en-US" altLang="en-GB" sz="1800">
+            <a:endParaRPr lang="en-GB" sz="2000">
               <a:latin typeface="Comic Sans MS" panose="030F0702030302020204" charset="0"/>
               <a:cs typeface="Comic Sans MS" panose="030F0702030302020204" charset="0"/>
             </a:endParaRPr>
@@ -10501,20 +10494,13 @@
               <a:buChar char="q"/>
             </a:pPr>
             <a:r>
-              <a:rPr lang="en-US" altLang="en-GB" sz="1800">
+              <a:rPr lang="en-US" altLang="en-GB" sz="2000">
                 <a:latin typeface="Comic Sans MS" panose="030F0702030302020204" charset="0"/>
                 <a:cs typeface="Comic Sans MS" panose="030F0702030302020204" charset="0"/>
               </a:rPr>
-              <a:t>Objectives</a:t>
+              <a:t>Gaps identified</a:t>
             </a:r>
-            <a:r>
-              <a:rPr lang="en-GB" sz="1800">
-                <a:latin typeface="Comic Sans MS" panose="030F0702030302020204" charset="0"/>
-                <a:cs typeface="Comic Sans MS" panose="030F0702030302020204" charset="0"/>
-              </a:rPr>
-              <a:t> </a:t>
-            </a:r>
-            <a:endParaRPr lang="en-GB" sz="1800">
+            <a:endParaRPr lang="en-US" altLang="en-GB" sz="2000">
               <a:latin typeface="Comic Sans MS" panose="030F0702030302020204" charset="0"/>
               <a:cs typeface="Comic Sans MS" panose="030F0702030302020204" charset="0"/>
             </a:endParaRPr>
@@ -10535,13 +10521,20 @@
               <a:buChar char="q"/>
             </a:pPr>
             <a:r>
-              <a:rPr lang="en-US" altLang="en-GB" sz="1800">
+              <a:rPr lang="en-US" altLang="en-GB" sz="2000">
                 <a:latin typeface="Comic Sans MS" panose="030F0702030302020204" charset="0"/>
                 <a:cs typeface="Comic Sans MS" panose="030F0702030302020204" charset="0"/>
               </a:rPr>
-              <a:t>Problem Statement</a:t>
+              <a:t>Objectives</a:t>
             </a:r>
-            <a:endParaRPr lang="en-US" altLang="en-GB" sz="1800">
+            <a:r>
+              <a:rPr lang="en-GB" sz="2000">
+                <a:latin typeface="Comic Sans MS" panose="030F0702030302020204" charset="0"/>
+                <a:cs typeface="Comic Sans MS" panose="030F0702030302020204" charset="0"/>
+              </a:rPr>
+              <a:t> </a:t>
+            </a:r>
+            <a:endParaRPr lang="en-GB" sz="2000">
               <a:latin typeface="Comic Sans MS" panose="030F0702030302020204" charset="0"/>
               <a:cs typeface="Comic Sans MS" panose="030F0702030302020204" charset="0"/>
             </a:endParaRPr>
@@ -10562,13 +10555,13 @@
               <a:buChar char="q"/>
             </a:pPr>
             <a:r>
-              <a:rPr lang="en-US" sz="1800">
+              <a:rPr lang="en-US" altLang="en-GB" sz="2000">
                 <a:latin typeface="Comic Sans MS" panose="030F0702030302020204" charset="0"/>
                 <a:cs typeface="Comic Sans MS" panose="030F0702030302020204" charset="0"/>
               </a:rPr>
-              <a:t>Project Plan</a:t>
+              <a:t>Problem Statement</a:t>
             </a:r>
-            <a:endParaRPr lang="en-US" sz="1800">
+            <a:endParaRPr lang="en-US" altLang="en-GB" sz="2000">
               <a:latin typeface="Comic Sans MS" panose="030F0702030302020204" charset="0"/>
               <a:cs typeface="Comic Sans MS" panose="030F0702030302020204" charset="0"/>
             </a:endParaRPr>
@@ -10589,67 +10582,13 @@
               <a:buChar char="q"/>
             </a:pPr>
             <a:r>
-              <a:rPr lang="en-US" altLang="en-GB" sz="1800">
+              <a:rPr lang="en-US" altLang="en-GB" sz="2000">
                 <a:latin typeface="Comic Sans MS" panose="030F0702030302020204" charset="0"/>
                 <a:cs typeface="Comic Sans MS" panose="030F0702030302020204" charset="0"/>
               </a:rPr>
-              <a:t>Proposed Architecture</a:t>
+              <a:t>Project Plan</a:t>
             </a:r>
-            <a:endParaRPr lang="en-US" altLang="en-GB" sz="1800">
-              <a:latin typeface="Comic Sans MS" panose="030F0702030302020204" charset="0"/>
-              <a:cs typeface="Comic Sans MS" panose="030F0702030302020204" charset="0"/>
-            </a:endParaRPr>
-          </a:p>
-          <a:p>
-            <a:pPr lvl="0" algn="l" rtl="0">
-              <a:lnSpc>
-                <a:spcPct val="150000"/>
-              </a:lnSpc>
-              <a:spcBef>
-                <a:spcPts val="360"/>
-              </a:spcBef>
-              <a:spcAft>
-                <a:spcPts val="0"/>
-              </a:spcAft>
-              <a:buSzPts val="1800"/>
-              <a:buFont typeface="Wingdings" panose="05000000000000000000" charset="0"/>
-              <a:buChar char="q"/>
-            </a:pPr>
-            <a:r>
-              <a:rPr lang="en-US" altLang="en-GB" sz="1800">
-                <a:latin typeface="Comic Sans MS" panose="030F0702030302020204" charset="0"/>
-                <a:cs typeface="Comic Sans MS" panose="030F0702030302020204" charset="0"/>
-              </a:rPr>
-              <a:t>Technologies to be used</a:t>
-            </a:r>
-            <a:endParaRPr lang="en-US" altLang="en-GB" sz="1800">
-              <a:latin typeface="Comic Sans MS" panose="030F0702030302020204" charset="0"/>
-              <a:cs typeface="Comic Sans MS" panose="030F0702030302020204" charset="0"/>
-            </a:endParaRPr>
-          </a:p>
-          <a:p>
-            <a:pPr lvl="0" algn="l" rtl="0">
-              <a:lnSpc>
-                <a:spcPct val="150000"/>
-              </a:lnSpc>
-              <a:spcBef>
-                <a:spcPts val="360"/>
-              </a:spcBef>
-              <a:spcAft>
-                <a:spcPts val="0"/>
-              </a:spcAft>
-              <a:buSzPts val="1800"/>
-              <a:buFont typeface="Wingdings" panose="05000000000000000000" charset="0"/>
-              <a:buChar char="q"/>
-            </a:pPr>
-            <a:r>
-              <a:rPr lang="en-US" altLang="en-GB" sz="1800">
-                <a:latin typeface="Comic Sans MS" panose="030F0702030302020204" charset="0"/>
-                <a:cs typeface="Comic Sans MS" panose="030F0702030302020204" charset="0"/>
-              </a:rPr>
-              <a:t>Reference Links</a:t>
-            </a:r>
-            <a:endParaRPr lang="en-US" altLang="en-GB" sz="1800">
+            <a:endParaRPr lang="en-US" altLang="en-GB" sz="2000">
               <a:latin typeface="Comic Sans MS" panose="030F0702030302020204" charset="0"/>
               <a:cs typeface="Comic Sans MS" panose="030F0702030302020204" charset="0"/>
             </a:endParaRPr>
@@ -10658,14 +10597,14 @@
       </p:sp>
       <p:sp>
         <p:nvSpPr>
-          <p:cNvPr id="1" name="Text Box 0"/>
+          <p:cNvPr id="2" name="Text Box 1"/>
           <p:cNvSpPr txBox="1"/>
           <p:nvPr/>
         </p:nvSpPr>
         <p:spPr>
           <a:xfrm>
             <a:off x="4385945" y="1104900"/>
-            <a:ext cx="3048000" cy="3723640"/>
+            <a:ext cx="3895725" cy="3147060"/>
           </a:xfrm>
           <a:prstGeom prst="rect">
             <a:avLst/>
@@ -10677,7 +10616,34 @@
             <a:noAutofit/>
           </a:bodyPr>
           <a:p>
-            <a:pPr lvl="0" algn="l" rtl="0">
+            <a:pPr marL="285750" lvl="0" indent="-285750" algn="l" rtl="0">
+              <a:lnSpc>
+                <a:spcPct val="150000"/>
+              </a:lnSpc>
+              <a:spcBef>
+                <a:spcPts val="360"/>
+              </a:spcBef>
+              <a:spcAft>
+                <a:spcPts val="0"/>
+              </a:spcAft>
+              <a:buClr>
+                <a:srgbClr val="FFFFFF"/>
+              </a:buClr>
+              <a:buSzPts val="1800"/>
+              <a:buFont typeface="Wingdings" panose="05000000000000000000" charset="0"/>
+              <a:buChar char="q"/>
+            </a:pPr>
+            <a:endParaRPr lang="en-US" altLang="en-GB" sz="2000">
+              <a:solidFill>
+                <a:schemeClr val="bg1"/>
+              </a:solidFill>
+              <a:latin typeface="Comic Sans MS" panose="030F0702030302020204" charset="0"/>
+              <a:cs typeface="Comic Sans MS" panose="030F0702030302020204" charset="0"/>
+              <a:sym typeface="+mn-ea"/>
+            </a:endParaRPr>
+          </a:p>
+          <a:p>
+            <a:pPr marL="285750" lvl="0" indent="-285750" algn="l" rtl="0">
               <a:lnSpc>
                 <a:spcPct val="150000"/>
               </a:lnSpc>
@@ -10695,7 +10661,7 @@
               <a:buChar char="q"/>
             </a:pPr>
             <a:r>
-              <a:rPr lang="en-GB" sz="1800">
+              <a:rPr lang="en-US" altLang="en-GB" sz="2000">
                 <a:solidFill>
                   <a:schemeClr val="bg1"/>
                 </a:solidFill>
@@ -10703,9 +10669,85 @@
                 <a:cs typeface="Comic Sans MS" panose="030F0702030302020204" charset="0"/>
                 <a:sym typeface="+mn-ea"/>
               </a:rPr>
-              <a:t>Introduction</a:t>
+              <a:t>Proposed Architecture</a:t>
             </a:r>
-            <a:endParaRPr lang="en-GB" sz="1800">
+            <a:endParaRPr lang="en-US" altLang="en-GB" sz="2000">
+              <a:solidFill>
+                <a:schemeClr val="bg1"/>
+              </a:solidFill>
+              <a:latin typeface="Comic Sans MS" panose="030F0702030302020204" charset="0"/>
+              <a:cs typeface="Comic Sans MS" panose="030F0702030302020204" charset="0"/>
+              <a:sym typeface="+mn-ea"/>
+            </a:endParaRPr>
+          </a:p>
+          <a:p>
+            <a:pPr marL="285750" lvl="0" indent="-285750" algn="l" rtl="0">
+              <a:lnSpc>
+                <a:spcPct val="150000"/>
+              </a:lnSpc>
+              <a:spcBef>
+                <a:spcPts val="360"/>
+              </a:spcBef>
+              <a:spcAft>
+                <a:spcPts val="0"/>
+              </a:spcAft>
+              <a:buClr>
+                <a:srgbClr val="FFFFFF"/>
+              </a:buClr>
+              <a:buSzPts val="1800"/>
+              <a:buFont typeface="Wingdings" panose="05000000000000000000" charset="0"/>
+              <a:buChar char="q"/>
+            </a:pPr>
+            <a:r>
+              <a:rPr lang="en-US" altLang="en-GB" sz="2000">
+                <a:solidFill>
+                  <a:schemeClr val="bg1"/>
+                </a:solidFill>
+                <a:latin typeface="Comic Sans MS" panose="030F0702030302020204" charset="0"/>
+                <a:cs typeface="Comic Sans MS" panose="030F0702030302020204" charset="0"/>
+                <a:sym typeface="+mn-ea"/>
+              </a:rPr>
+              <a:t>Technologies to be used</a:t>
+            </a:r>
+            <a:endParaRPr lang="en-US" altLang="en-GB" sz="2000">
+              <a:solidFill>
+                <a:schemeClr val="bg1"/>
+              </a:solidFill>
+              <a:latin typeface="Comic Sans MS" panose="030F0702030302020204" charset="0"/>
+              <a:cs typeface="Comic Sans MS" panose="030F0702030302020204" charset="0"/>
+              <a:sym typeface="+mn-ea"/>
+            </a:endParaRPr>
+          </a:p>
+          <a:p>
+            <a:pPr marL="285750" lvl="0" indent="-285750" algn="l" rtl="0">
+              <a:lnSpc>
+                <a:spcPct val="150000"/>
+              </a:lnSpc>
+              <a:spcBef>
+                <a:spcPts val="360"/>
+              </a:spcBef>
+              <a:spcAft>
+                <a:spcPts val="0"/>
+              </a:spcAft>
+              <a:buClr>
+                <a:srgbClr val="FFFFFF"/>
+              </a:buClr>
+              <a:buSzPts val="1800"/>
+              <a:buFont typeface="Wingdings" panose="05000000000000000000" charset="0"/>
+              <a:buChar char="q"/>
+            </a:pPr>
+            <a:r>
+              <a:rPr lang="en-US" altLang="en-GB" sz="2000">
+                <a:solidFill>
+                  <a:schemeClr val="bg1"/>
+                </a:solidFill>
+                <a:latin typeface="Comic Sans MS" panose="030F0702030302020204" charset="0"/>
+                <a:cs typeface="Comic Sans MS" panose="030F0702030302020204" charset="0"/>
+                <a:sym typeface="+mn-ea"/>
+              </a:rPr>
+              <a:t>Methodology Adapted	</a:t>
+            </a:r>
+            <a:endParaRPr lang="en-GB" sz="2000">
               <a:solidFill>
                 <a:schemeClr val="bg1"/>
               </a:solidFill>
@@ -10732,7 +10774,7 @@
               <a:buChar char="q"/>
             </a:pPr>
             <a:r>
-              <a:rPr lang="en-US" altLang="en-GB" sz="1800">
+              <a:rPr lang="en-US" altLang="en-GB" sz="2000">
                 <a:solidFill>
                   <a:schemeClr val="bg1"/>
                 </a:solidFill>
@@ -10740,9 +10782,9 @@
                 <a:cs typeface="Comic Sans MS" panose="030F0702030302020204" charset="0"/>
                 <a:sym typeface="+mn-ea"/>
               </a:rPr>
-              <a:t>Gaps identified</a:t>
+              <a:t> Results and Discussion</a:t>
             </a:r>
-            <a:endParaRPr lang="en-US" altLang="en-GB" sz="1800">
+            <a:endParaRPr lang="en-US" altLang="en-GB" sz="2000">
               <a:solidFill>
                 <a:schemeClr val="bg1"/>
               </a:solidFill>
@@ -10769,7 +10811,7 @@
               <a:buChar char="q"/>
             </a:pPr>
             <a:r>
-              <a:rPr lang="en-US" altLang="en-GB" sz="1800">
+              <a:rPr lang="en-US" altLang="en-GB" sz="2000">
                 <a:solidFill>
                   <a:schemeClr val="bg1"/>
                 </a:solidFill>
@@ -10777,205 +10819,9 @@
                 <a:cs typeface="Comic Sans MS" panose="030F0702030302020204" charset="0"/>
                 <a:sym typeface="+mn-ea"/>
               </a:rPr>
-              <a:t>Objectives</a:t>
+              <a:t> Reference Links</a:t>
             </a:r>
-            <a:r>
-              <a:rPr lang="en-GB" sz="1800">
-                <a:solidFill>
-                  <a:schemeClr val="bg1"/>
-                </a:solidFill>
-                <a:latin typeface="Comic Sans MS" panose="030F0702030302020204" charset="0"/>
-                <a:cs typeface="Comic Sans MS" panose="030F0702030302020204" charset="0"/>
-                <a:sym typeface="+mn-ea"/>
-              </a:rPr>
-              <a:t> </a:t>
-            </a:r>
-            <a:endParaRPr lang="en-GB" sz="1800">
-              <a:solidFill>
-                <a:schemeClr val="bg1"/>
-              </a:solidFill>
-              <a:latin typeface="Comic Sans MS" panose="030F0702030302020204" charset="0"/>
-              <a:cs typeface="Comic Sans MS" panose="030F0702030302020204" charset="0"/>
-            </a:endParaRPr>
-          </a:p>
-          <a:p>
-            <a:pPr lvl="0" algn="l" rtl="0">
-              <a:lnSpc>
-                <a:spcPct val="150000"/>
-              </a:lnSpc>
-              <a:spcBef>
-                <a:spcPts val="360"/>
-              </a:spcBef>
-              <a:spcAft>
-                <a:spcPts val="0"/>
-              </a:spcAft>
-              <a:buClr>
-                <a:srgbClr val="FFFFFF"/>
-              </a:buClr>
-              <a:buSzPts val="1800"/>
-              <a:buFont typeface="Wingdings" panose="05000000000000000000" charset="0"/>
-              <a:buChar char="q"/>
-            </a:pPr>
-            <a:r>
-              <a:rPr lang="en-US" altLang="en-GB" sz="1800">
-                <a:solidFill>
-                  <a:schemeClr val="bg1"/>
-                </a:solidFill>
-                <a:latin typeface="Comic Sans MS" panose="030F0702030302020204" charset="0"/>
-                <a:cs typeface="Comic Sans MS" panose="030F0702030302020204" charset="0"/>
-                <a:sym typeface="+mn-ea"/>
-              </a:rPr>
-              <a:t>Problem Statement</a:t>
-            </a:r>
-            <a:endParaRPr lang="en-US" altLang="en-GB" sz="1800">
-              <a:solidFill>
-                <a:schemeClr val="bg1"/>
-              </a:solidFill>
-              <a:latin typeface="Comic Sans MS" panose="030F0702030302020204" charset="0"/>
-              <a:cs typeface="Comic Sans MS" panose="030F0702030302020204" charset="0"/>
-            </a:endParaRPr>
-          </a:p>
-          <a:p>
-            <a:pPr lvl="0" algn="l" rtl="0">
-              <a:lnSpc>
-                <a:spcPct val="150000"/>
-              </a:lnSpc>
-              <a:spcBef>
-                <a:spcPts val="360"/>
-              </a:spcBef>
-              <a:spcAft>
-                <a:spcPts val="0"/>
-              </a:spcAft>
-              <a:buClr>
-                <a:srgbClr val="FFFFFF"/>
-              </a:buClr>
-              <a:buSzPts val="1800"/>
-              <a:buFont typeface="Wingdings" panose="05000000000000000000" charset="0"/>
-              <a:buChar char="q"/>
-            </a:pPr>
-            <a:r>
-              <a:rPr lang="en-US" sz="1800">
-                <a:solidFill>
-                  <a:schemeClr val="bg1"/>
-                </a:solidFill>
-                <a:latin typeface="Comic Sans MS" panose="030F0702030302020204" charset="0"/>
-                <a:cs typeface="Comic Sans MS" panose="030F0702030302020204" charset="0"/>
-                <a:sym typeface="+mn-ea"/>
-              </a:rPr>
-              <a:t>Project Plan</a:t>
-            </a:r>
-            <a:endParaRPr lang="en-US" sz="1800">
-              <a:solidFill>
-                <a:schemeClr val="bg1"/>
-              </a:solidFill>
-              <a:latin typeface="Comic Sans MS" panose="030F0702030302020204" charset="0"/>
-              <a:cs typeface="Comic Sans MS" panose="030F0702030302020204" charset="0"/>
-            </a:endParaRPr>
-          </a:p>
-          <a:p>
-            <a:pPr lvl="0" algn="l" rtl="0">
-              <a:lnSpc>
-                <a:spcPct val="150000"/>
-              </a:lnSpc>
-              <a:spcBef>
-                <a:spcPts val="360"/>
-              </a:spcBef>
-              <a:spcAft>
-                <a:spcPts val="0"/>
-              </a:spcAft>
-              <a:buClr>
-                <a:srgbClr val="FFFFFF"/>
-              </a:buClr>
-              <a:buSzPts val="1800"/>
-              <a:buFont typeface="Wingdings" panose="05000000000000000000" charset="0"/>
-              <a:buChar char="q"/>
-            </a:pPr>
-            <a:r>
-              <a:rPr lang="en-US" altLang="en-GB" sz="1800">
-                <a:solidFill>
-                  <a:schemeClr val="bg1"/>
-                </a:solidFill>
-                <a:latin typeface="Comic Sans MS" panose="030F0702030302020204" charset="0"/>
-                <a:cs typeface="Comic Sans MS" panose="030F0702030302020204" charset="0"/>
-                <a:sym typeface="+mn-ea"/>
-              </a:rPr>
-              <a:t>Proposed Architecture</a:t>
-            </a:r>
-            <a:endParaRPr lang="en-US" altLang="en-GB" sz="1800">
-              <a:solidFill>
-                <a:schemeClr val="bg1"/>
-              </a:solidFill>
-              <a:latin typeface="Comic Sans MS" panose="030F0702030302020204" charset="0"/>
-              <a:cs typeface="Comic Sans MS" panose="030F0702030302020204" charset="0"/>
-            </a:endParaRPr>
-          </a:p>
-          <a:p>
-            <a:pPr lvl="0" algn="l" rtl="0">
-              <a:lnSpc>
-                <a:spcPct val="150000"/>
-              </a:lnSpc>
-              <a:spcBef>
-                <a:spcPts val="360"/>
-              </a:spcBef>
-              <a:spcAft>
-                <a:spcPts val="0"/>
-              </a:spcAft>
-              <a:buClr>
-                <a:srgbClr val="FFFFFF"/>
-              </a:buClr>
-              <a:buSzPts val="1800"/>
-              <a:buFont typeface="Wingdings" panose="05000000000000000000" charset="0"/>
-              <a:buChar char="q"/>
-            </a:pPr>
-            <a:r>
-              <a:rPr lang="en-US" altLang="en-GB" sz="1800">
-                <a:solidFill>
-                  <a:schemeClr val="bg1"/>
-                </a:solidFill>
-                <a:latin typeface="Comic Sans MS" panose="030F0702030302020204" charset="0"/>
-                <a:cs typeface="Comic Sans MS" panose="030F0702030302020204" charset="0"/>
-                <a:sym typeface="+mn-ea"/>
-              </a:rPr>
-              <a:t>Technologies to be used</a:t>
-            </a:r>
-            <a:endParaRPr lang="en-US" altLang="en-GB" sz="1800">
-              <a:solidFill>
-                <a:schemeClr val="bg1"/>
-              </a:solidFill>
-              <a:latin typeface="Comic Sans MS" panose="030F0702030302020204" charset="0"/>
-              <a:cs typeface="Comic Sans MS" panose="030F0702030302020204" charset="0"/>
-            </a:endParaRPr>
-          </a:p>
-          <a:p>
-            <a:pPr lvl="0" algn="l" rtl="0">
-              <a:lnSpc>
-                <a:spcPct val="150000"/>
-              </a:lnSpc>
-              <a:spcBef>
-                <a:spcPts val="360"/>
-              </a:spcBef>
-              <a:spcAft>
-                <a:spcPts val="0"/>
-              </a:spcAft>
-              <a:buClr>
-                <a:srgbClr val="FFFFFF"/>
-              </a:buClr>
-              <a:buSzPts val="1800"/>
-              <a:buFont typeface="Wingdings" panose="05000000000000000000" charset="0"/>
-              <a:buChar char="q"/>
-            </a:pPr>
-            <a:r>
-              <a:rPr lang="en-US" altLang="en-GB" sz="1800">
-                <a:solidFill>
-                  <a:schemeClr val="bg1"/>
-                </a:solidFill>
-                <a:latin typeface="Comic Sans MS" panose="030F0702030302020204" charset="0"/>
-                <a:cs typeface="Comic Sans MS" panose="030F0702030302020204" charset="0"/>
-                <a:sym typeface="+mn-ea"/>
-              </a:rPr>
-              <a:t>Reference Links</a:t>
-            </a:r>
-            <a:endParaRPr lang="en-US" altLang="en-GB" sz="1800">
+            <a:endParaRPr lang="en-US" altLang="en-GB" sz="2000">
               <a:solidFill>
                 <a:schemeClr val="bg1"/>
               </a:solidFill>
@@ -10991,7 +10837,7 @@
               <a:buFont typeface="Wingdings" panose="05000000000000000000" charset="0"/>
               <a:buChar char="q"/>
             </a:pPr>
-            <a:endParaRPr lang="en-US" altLang="en-GB" sz="1800">
+            <a:endParaRPr lang="en-US" altLang="en-GB" sz="2000">
               <a:solidFill>
                 <a:schemeClr val="bg1"/>
               </a:solidFill>

--- a/Review 2.pptx
+++ b/Review 2.pptx
@@ -16,46 +16,50 @@
     <p:sldId id="291" r:id="rId9"/>
     <p:sldId id="307" r:id="rId10"/>
     <p:sldId id="292" r:id="rId11"/>
-    <p:sldId id="308" r:id="rId12"/>
-    <p:sldId id="297" r:id="rId13"/>
-    <p:sldId id="300" r:id="rId14"/>
+    <p:sldId id="332" r:id="rId12"/>
+    <p:sldId id="333" r:id="rId13"/>
+    <p:sldId id="297" r:id="rId14"/>
     <p:sldId id="326" r:id="rId15"/>
     <p:sldId id="327" r:id="rId16"/>
     <p:sldId id="328" r:id="rId17"/>
     <p:sldId id="329" r:id="rId18"/>
-    <p:sldId id="330" r:id="rId19"/>
-    <p:sldId id="331" r:id="rId20"/>
-    <p:sldId id="302" r:id="rId21"/>
-    <p:sldId id="303" r:id="rId22"/>
+    <p:sldId id="334" r:id="rId19"/>
+    <p:sldId id="335" r:id="rId20"/>
+    <p:sldId id="336" r:id="rId21"/>
+    <p:sldId id="331" r:id="rId22"/>
+    <p:sldId id="337" r:id="rId23"/>
+    <p:sldId id="338" r:id="rId24"/>
+    <p:sldId id="302" r:id="rId25"/>
+    <p:sldId id="303" r:id="rId26"/>
   </p:sldIdLst>
   <p:sldSz cx="9144000" cy="5143500"/>
   <p:notesSz cx="6858000" cy="9144000"/>
   <p:embeddedFontLst>
     <p:embeddedFont>
       <p:font typeface="Algerian" panose="04020705040A02060702" charset="0"/>
-      <p:regular r:id="rId26"/>
+      <p:regular r:id="rId30"/>
     </p:embeddedFont>
     <p:embeddedFont>
       <p:font typeface="Comic Sans MS" panose="030F0702030302020204" charset="0"/>
-      <p:regular r:id="rId27"/>
-      <p:bold r:id="rId28"/>
-      <p:italic r:id="rId29"/>
-      <p:boldItalic r:id="rId30"/>
-    </p:embeddedFont>
-    <p:embeddedFont>
-      <p:font typeface="Merriweather" panose="00000500000000000000"/>
       <p:regular r:id="rId31"/>
       <p:bold r:id="rId32"/>
       <p:italic r:id="rId33"/>
       <p:boldItalic r:id="rId34"/>
     </p:embeddedFont>
     <p:embeddedFont>
+      <p:font typeface="Merriweather" panose="00000500000000000000"/>
+      <p:regular r:id="rId35"/>
+      <p:bold r:id="rId36"/>
+      <p:italic r:id="rId37"/>
+      <p:boldItalic r:id="rId38"/>
+    </p:embeddedFont>
+    <p:embeddedFont>
       <p:font typeface="Cambria Math" panose="02040503050406030204"/>
-      <p:regular r:id="rId35"/>
+      <p:regular r:id="rId39"/>
     </p:embeddedFont>
     <p:embeddedFont>
       <p:font typeface="Algerian" panose="04020705040A02060702"/>
-      <p:regular r:id="rId36"/>
+      <p:regular r:id="rId40"/>
     </p:embeddedFont>
   </p:embeddedFontLst>
   <p:defaultTextStyle>
@@ -1736,7 +1740,7 @@
   <p:cSld>
     <p:spTree>
       <p:nvGrpSpPr>
-        <p:cNvPr id="44" name="Shape 44"/>
+        <p:cNvPr id="50" name="Shape 50"/>
         <p:cNvGrpSpPr/>
         <p:nvPr/>
       </p:nvGrpSpPr>
@@ -1750,7 +1754,7 @@
       </p:grpSpPr>
       <p:sp>
         <p:nvSpPr>
-          <p:cNvPr id="45" name="Google Shape;45;p:notes"/>
+          <p:cNvPr id="51" name="Google Shape;51;gaa74f48cca_3_44:notes"/>
           <p:cNvSpPr/>
           <p:nvPr>
             <p:ph type="sldImg" idx="2"/>
@@ -1759,7 +1763,7 @@
         <p:spPr>
           <a:xfrm>
             <a:off x="381300" y="685800"/>
-            <a:ext cx="6096075" cy="3429000"/>
+            <a:ext cx="6096000" cy="3429000"/>
           </a:xfrm>
           <a:custGeom>
             <a:avLst/>
@@ -1789,7 +1793,7 @@
       </p:sp>
       <p:sp>
         <p:nvSpPr>
-          <p:cNvPr id="46" name="Google Shape;46;p:notes"/>
+          <p:cNvPr id="52" name="Google Shape;52;gaa74f48cca_3_44:notes"/>
           <p:cNvSpPr txBox="1"/>
           <p:nvPr>
             <p:ph type="body" idx="1"/>
@@ -1889,6 +1893,402 @@
       <p:sp>
         <p:nvSpPr>
           <p:cNvPr id="52" name="Google Shape;52;gaa74f48cca_3_44:notes"/>
+          <p:cNvSpPr txBox="1"/>
+          <p:nvPr>
+            <p:ph type="body" idx="1"/>
+          </p:nvPr>
+        </p:nvSpPr>
+        <p:spPr>
+          <a:xfrm>
+            <a:off x="685800" y="4343400"/>
+            <a:ext cx="5486400" cy="4114800"/>
+          </a:xfrm>
+          <a:prstGeom prst="rect">
+            <a:avLst/>
+          </a:prstGeom>
+        </p:spPr>
+        <p:txBody>
+          <a:bodyPr spcFirstLastPara="1" wrap="square" lIns="91425" tIns="91425" rIns="91425" bIns="91425" anchor="t" anchorCtr="0">
+            <a:noAutofit/>
+          </a:bodyPr>
+          <a:lstStyle/>
+          <a:p>
+            <a:pPr marL="0" lvl="0" indent="0" algn="l" rtl="0">
+              <a:spcBef>
+                <a:spcPts val="0"/>
+              </a:spcBef>
+              <a:spcAft>
+                <a:spcPts val="0"/>
+              </a:spcAft>
+              <a:buNone/>
+            </a:pPr>
+          </a:p>
+        </p:txBody>
+      </p:sp>
+    </p:spTree>
+  </p:cSld>
+  <p:clrMapOvr>
+    <a:masterClrMapping/>
+  </p:clrMapOvr>
+</p:notes>
+</file>
+
+<file path=ppt/notesSlides/notesSlide20.xml><?xml version="1.0" encoding="utf-8"?>
+<p:notes xmlns:a="http://schemas.openxmlformats.org/drawingml/2006/main" xmlns:r="http://schemas.openxmlformats.org/officeDocument/2006/relationships" xmlns:p="http://schemas.openxmlformats.org/presentationml/2006/main" showMasterPhAnim="0" showMasterSp="0">
+  <p:cSld>
+    <p:spTree>
+      <p:nvGrpSpPr>
+        <p:cNvPr id="50" name="Shape 50"/>
+        <p:cNvGrpSpPr/>
+        <p:nvPr/>
+      </p:nvGrpSpPr>
+      <p:grpSpPr>
+        <a:xfrm>
+          <a:off x="0" y="0"/>
+          <a:ext cx="0" cy="0"/>
+          <a:chOff x="0" y="0"/>
+          <a:chExt cx="0" cy="0"/>
+        </a:xfrm>
+      </p:grpSpPr>
+      <p:sp>
+        <p:nvSpPr>
+          <p:cNvPr id="51" name="Google Shape;51;gaa74f48cca_3_44:notes"/>
+          <p:cNvSpPr/>
+          <p:nvPr>
+            <p:ph type="sldImg" idx="2"/>
+          </p:nvPr>
+        </p:nvSpPr>
+        <p:spPr>
+          <a:xfrm>
+            <a:off x="381300" y="685800"/>
+            <a:ext cx="6096000" cy="3429000"/>
+          </a:xfrm>
+          <a:custGeom>
+            <a:avLst/>
+            <a:gdLst/>
+            <a:ahLst/>
+            <a:cxnLst/>
+            <a:rect l="l" t="t" r="r" b="b"/>
+            <a:pathLst>
+              <a:path w="120000" h="120000" extrusionOk="0">
+                <a:moveTo>
+                  <a:pt x="0" y="0"/>
+                </a:moveTo>
+                <a:lnTo>
+                  <a:pt x="120000" y="0"/>
+                </a:lnTo>
+                <a:lnTo>
+                  <a:pt x="120000" y="120000"/>
+                </a:lnTo>
+                <a:lnTo>
+                  <a:pt x="0" y="120000"/>
+                </a:lnTo>
+                <a:close/>
+              </a:path>
+            </a:pathLst>
+          </a:custGeom>
+        </p:spPr>
+      </p:sp>
+      <p:sp>
+        <p:nvSpPr>
+          <p:cNvPr id="52" name="Google Shape;52;gaa74f48cca_3_44:notes"/>
+          <p:cNvSpPr txBox="1"/>
+          <p:nvPr>
+            <p:ph type="body" idx="1"/>
+          </p:nvPr>
+        </p:nvSpPr>
+        <p:spPr>
+          <a:xfrm>
+            <a:off x="685800" y="4343400"/>
+            <a:ext cx="5486400" cy="4114800"/>
+          </a:xfrm>
+          <a:prstGeom prst="rect">
+            <a:avLst/>
+          </a:prstGeom>
+        </p:spPr>
+        <p:txBody>
+          <a:bodyPr spcFirstLastPara="1" wrap="square" lIns="91425" tIns="91425" rIns="91425" bIns="91425" anchor="t" anchorCtr="0">
+            <a:noAutofit/>
+          </a:bodyPr>
+          <a:lstStyle/>
+          <a:p>
+            <a:pPr marL="0" lvl="0" indent="0" algn="l" rtl="0">
+              <a:spcBef>
+                <a:spcPts val="0"/>
+              </a:spcBef>
+              <a:spcAft>
+                <a:spcPts val="0"/>
+              </a:spcAft>
+              <a:buNone/>
+            </a:pPr>
+          </a:p>
+        </p:txBody>
+      </p:sp>
+    </p:spTree>
+  </p:cSld>
+  <p:clrMapOvr>
+    <a:masterClrMapping/>
+  </p:clrMapOvr>
+</p:notes>
+</file>
+
+<file path=ppt/notesSlides/notesSlide21.xml><?xml version="1.0" encoding="utf-8"?>
+<p:notes xmlns:a="http://schemas.openxmlformats.org/drawingml/2006/main" xmlns:r="http://schemas.openxmlformats.org/officeDocument/2006/relationships" xmlns:p="http://schemas.openxmlformats.org/presentationml/2006/main" showMasterPhAnim="0" showMasterSp="0">
+  <p:cSld>
+    <p:spTree>
+      <p:nvGrpSpPr>
+        <p:cNvPr id="50" name="Shape 50"/>
+        <p:cNvGrpSpPr/>
+        <p:nvPr/>
+      </p:nvGrpSpPr>
+      <p:grpSpPr>
+        <a:xfrm>
+          <a:off x="0" y="0"/>
+          <a:ext cx="0" cy="0"/>
+          <a:chOff x="0" y="0"/>
+          <a:chExt cx="0" cy="0"/>
+        </a:xfrm>
+      </p:grpSpPr>
+      <p:sp>
+        <p:nvSpPr>
+          <p:cNvPr id="51" name="Google Shape;51;gaa74f48cca_3_44:notes"/>
+          <p:cNvSpPr/>
+          <p:nvPr>
+            <p:ph type="sldImg" idx="2"/>
+          </p:nvPr>
+        </p:nvSpPr>
+        <p:spPr>
+          <a:xfrm>
+            <a:off x="381300" y="685800"/>
+            <a:ext cx="6096000" cy="3429000"/>
+          </a:xfrm>
+          <a:custGeom>
+            <a:avLst/>
+            <a:gdLst/>
+            <a:ahLst/>
+            <a:cxnLst/>
+            <a:rect l="l" t="t" r="r" b="b"/>
+            <a:pathLst>
+              <a:path w="120000" h="120000" extrusionOk="0">
+                <a:moveTo>
+                  <a:pt x="0" y="0"/>
+                </a:moveTo>
+                <a:lnTo>
+                  <a:pt x="120000" y="0"/>
+                </a:lnTo>
+                <a:lnTo>
+                  <a:pt x="120000" y="120000"/>
+                </a:lnTo>
+                <a:lnTo>
+                  <a:pt x="0" y="120000"/>
+                </a:lnTo>
+                <a:close/>
+              </a:path>
+            </a:pathLst>
+          </a:custGeom>
+        </p:spPr>
+      </p:sp>
+      <p:sp>
+        <p:nvSpPr>
+          <p:cNvPr id="52" name="Google Shape;52;gaa74f48cca_3_44:notes"/>
+          <p:cNvSpPr txBox="1"/>
+          <p:nvPr>
+            <p:ph type="body" idx="1"/>
+          </p:nvPr>
+        </p:nvSpPr>
+        <p:spPr>
+          <a:xfrm>
+            <a:off x="685800" y="4343400"/>
+            <a:ext cx="5486400" cy="4114800"/>
+          </a:xfrm>
+          <a:prstGeom prst="rect">
+            <a:avLst/>
+          </a:prstGeom>
+        </p:spPr>
+        <p:txBody>
+          <a:bodyPr spcFirstLastPara="1" wrap="square" lIns="91425" tIns="91425" rIns="91425" bIns="91425" anchor="t" anchorCtr="0">
+            <a:noAutofit/>
+          </a:bodyPr>
+          <a:lstStyle/>
+          <a:p>
+            <a:pPr marL="0" lvl="0" indent="0" algn="l" rtl="0">
+              <a:spcBef>
+                <a:spcPts val="0"/>
+              </a:spcBef>
+              <a:spcAft>
+                <a:spcPts val="0"/>
+              </a:spcAft>
+              <a:buNone/>
+            </a:pPr>
+          </a:p>
+        </p:txBody>
+      </p:sp>
+    </p:spTree>
+  </p:cSld>
+  <p:clrMapOvr>
+    <a:masterClrMapping/>
+  </p:clrMapOvr>
+</p:notes>
+</file>
+
+<file path=ppt/notesSlides/notesSlide22.xml><?xml version="1.0" encoding="utf-8"?>
+<p:notes xmlns:a="http://schemas.openxmlformats.org/drawingml/2006/main" xmlns:r="http://schemas.openxmlformats.org/officeDocument/2006/relationships" xmlns:p="http://schemas.openxmlformats.org/presentationml/2006/main" showMasterPhAnim="0" showMasterSp="0">
+  <p:cSld>
+    <p:spTree>
+      <p:nvGrpSpPr>
+        <p:cNvPr id="50" name="Shape 50"/>
+        <p:cNvGrpSpPr/>
+        <p:nvPr/>
+      </p:nvGrpSpPr>
+      <p:grpSpPr>
+        <a:xfrm>
+          <a:off x="0" y="0"/>
+          <a:ext cx="0" cy="0"/>
+          <a:chOff x="0" y="0"/>
+          <a:chExt cx="0" cy="0"/>
+        </a:xfrm>
+      </p:grpSpPr>
+      <p:sp>
+        <p:nvSpPr>
+          <p:cNvPr id="51" name="Google Shape;51;gaa74f48cca_3_44:notes"/>
+          <p:cNvSpPr/>
+          <p:nvPr>
+            <p:ph type="sldImg" idx="2"/>
+          </p:nvPr>
+        </p:nvSpPr>
+        <p:spPr>
+          <a:xfrm>
+            <a:off x="381300" y="685800"/>
+            <a:ext cx="6096000" cy="3429000"/>
+          </a:xfrm>
+          <a:custGeom>
+            <a:avLst/>
+            <a:gdLst/>
+            <a:ahLst/>
+            <a:cxnLst/>
+            <a:rect l="l" t="t" r="r" b="b"/>
+            <a:pathLst>
+              <a:path w="120000" h="120000" extrusionOk="0">
+                <a:moveTo>
+                  <a:pt x="0" y="0"/>
+                </a:moveTo>
+                <a:lnTo>
+                  <a:pt x="120000" y="0"/>
+                </a:lnTo>
+                <a:lnTo>
+                  <a:pt x="120000" y="120000"/>
+                </a:lnTo>
+                <a:lnTo>
+                  <a:pt x="0" y="120000"/>
+                </a:lnTo>
+                <a:close/>
+              </a:path>
+            </a:pathLst>
+          </a:custGeom>
+        </p:spPr>
+      </p:sp>
+      <p:sp>
+        <p:nvSpPr>
+          <p:cNvPr id="52" name="Google Shape;52;gaa74f48cca_3_44:notes"/>
+          <p:cNvSpPr txBox="1"/>
+          <p:nvPr>
+            <p:ph type="body" idx="1"/>
+          </p:nvPr>
+        </p:nvSpPr>
+        <p:spPr>
+          <a:xfrm>
+            <a:off x="685800" y="4343400"/>
+            <a:ext cx="5486400" cy="4114800"/>
+          </a:xfrm>
+          <a:prstGeom prst="rect">
+            <a:avLst/>
+          </a:prstGeom>
+        </p:spPr>
+        <p:txBody>
+          <a:bodyPr spcFirstLastPara="1" wrap="square" lIns="91425" tIns="91425" rIns="91425" bIns="91425" anchor="t" anchorCtr="0">
+            <a:noAutofit/>
+          </a:bodyPr>
+          <a:lstStyle/>
+          <a:p>
+            <a:pPr marL="0" lvl="0" indent="0" algn="l" rtl="0">
+              <a:spcBef>
+                <a:spcPts val="0"/>
+              </a:spcBef>
+              <a:spcAft>
+                <a:spcPts val="0"/>
+              </a:spcAft>
+              <a:buNone/>
+            </a:pPr>
+          </a:p>
+        </p:txBody>
+      </p:sp>
+    </p:spTree>
+  </p:cSld>
+  <p:clrMapOvr>
+    <a:masterClrMapping/>
+  </p:clrMapOvr>
+</p:notes>
+</file>
+
+<file path=ppt/notesSlides/notesSlide23.xml><?xml version="1.0" encoding="utf-8"?>
+<p:notes xmlns:a="http://schemas.openxmlformats.org/drawingml/2006/main" xmlns:r="http://schemas.openxmlformats.org/officeDocument/2006/relationships" xmlns:p="http://schemas.openxmlformats.org/presentationml/2006/main" showMasterPhAnim="0" showMasterSp="0">
+  <p:cSld>
+    <p:spTree>
+      <p:nvGrpSpPr>
+        <p:cNvPr id="44" name="Shape 44"/>
+        <p:cNvGrpSpPr/>
+        <p:nvPr/>
+      </p:nvGrpSpPr>
+      <p:grpSpPr>
+        <a:xfrm>
+          <a:off x="0" y="0"/>
+          <a:ext cx="0" cy="0"/>
+          <a:chOff x="0" y="0"/>
+          <a:chExt cx="0" cy="0"/>
+        </a:xfrm>
+      </p:grpSpPr>
+      <p:sp>
+        <p:nvSpPr>
+          <p:cNvPr id="45" name="Google Shape;45;p:notes"/>
+          <p:cNvSpPr/>
+          <p:nvPr>
+            <p:ph type="sldImg" idx="2"/>
+          </p:nvPr>
+        </p:nvSpPr>
+        <p:spPr>
+          <a:xfrm>
+            <a:off x="381300" y="685800"/>
+            <a:ext cx="6096075" cy="3429000"/>
+          </a:xfrm>
+          <a:custGeom>
+            <a:avLst/>
+            <a:gdLst/>
+            <a:ahLst/>
+            <a:cxnLst/>
+            <a:rect l="l" t="t" r="r" b="b"/>
+            <a:pathLst>
+              <a:path w="120000" h="120000" extrusionOk="0">
+                <a:moveTo>
+                  <a:pt x="0" y="0"/>
+                </a:moveTo>
+                <a:lnTo>
+                  <a:pt x="120000" y="0"/>
+                </a:lnTo>
+                <a:lnTo>
+                  <a:pt x="120000" y="120000"/>
+                </a:lnTo>
+                <a:lnTo>
+                  <a:pt x="0" y="120000"/>
+                </a:lnTo>
+                <a:close/>
+              </a:path>
+            </a:pathLst>
+          </a:custGeom>
+        </p:spPr>
+      </p:sp>
+      <p:sp>
+        <p:nvSpPr>
+          <p:cNvPr id="46" name="Google Shape;46;p:notes"/>
           <p:cNvSpPr txBox="1"/>
           <p:nvPr>
             <p:ph type="body" idx="1"/>
@@ -8209,7 +8609,7 @@
                 <a:latin typeface="Comic Sans MS" panose="030F0702030302020204" charset="0"/>
                 <a:cs typeface="Comic Sans MS" panose="030F0702030302020204" charset="0"/>
               </a:rPr>
-              <a:t>Date: 28/01/2025</a:t>
+              <a:t>Date: 16/04/2025</a:t>
             </a:r>
             <a:endParaRPr lang="en-US">
               <a:solidFill>
@@ -8230,6 +8630,305 @@
 </file>
 
 <file path=ppt/slides/slide10.xml><?xml version="1.0" encoding="utf-8"?>
+<p:sld xmlns:a="http://schemas.openxmlformats.org/drawingml/2006/main" xmlns:r="http://schemas.openxmlformats.org/officeDocument/2006/relationships" xmlns:p="http://schemas.openxmlformats.org/presentationml/2006/main">
+  <p:cSld>
+    <p:bg>
+      <p:bgPr>
+        <a:blipFill rotWithShape="1">
+          <a:blip r:embed="rId1"/>
+          <a:stretch>
+            <a:fillRect/>
+          </a:stretch>
+        </a:blipFill>
+        <a:effectLst/>
+      </p:bgPr>
+    </p:bg>
+    <p:spTree>
+      <p:nvGrpSpPr>
+        <p:cNvPr id="53" name="Shape 53"/>
+        <p:cNvGrpSpPr/>
+        <p:nvPr/>
+      </p:nvGrpSpPr>
+      <p:grpSpPr>
+        <a:xfrm>
+          <a:off x="0" y="0"/>
+          <a:ext cx="0" cy="0"/>
+          <a:chOff x="0" y="0"/>
+          <a:chExt cx="0" cy="0"/>
+        </a:xfrm>
+      </p:grpSpPr>
+      <p:sp>
+        <p:nvSpPr>
+          <p:cNvPr id="54" name="Google Shape;54;p14"/>
+          <p:cNvSpPr txBox="1"/>
+          <p:nvPr>
+            <p:ph type="title"/>
+          </p:nvPr>
+        </p:nvSpPr>
+        <p:spPr>
+          <a:xfrm>
+            <a:off x="246380" y="97790"/>
+            <a:ext cx="8804275" cy="673735"/>
+          </a:xfrm>
+          <a:prstGeom prst="rect">
+            <a:avLst/>
+          </a:prstGeom>
+        </p:spPr>
+        <p:txBody>
+          <a:bodyPr spcFirstLastPara="1" wrap="square" lIns="91425" tIns="45700" rIns="91425" bIns="45700" anchor="ctr" anchorCtr="0">
+            <a:noAutofit/>
+          </a:bodyPr>
+          <a:lstStyle/>
+          <a:p>
+            <a:pPr marL="0" lvl="0" indent="0" algn="ctr" rtl="0">
+              <a:spcBef>
+                <a:spcPts val="0"/>
+              </a:spcBef>
+              <a:spcAft>
+                <a:spcPts val="0"/>
+              </a:spcAft>
+              <a:buNone/>
+            </a:pPr>
+            <a:r>
+              <a:rPr lang="en-US" altLang="en-GB" sz="3400" u="sng">
+                <a:latin typeface="Algerian" panose="04020705040A02060702"/>
+                <a:ea typeface="Algerian" panose="04020705040A02060702"/>
+                <a:cs typeface="Algerian" panose="04020705040A02060702"/>
+                <a:sym typeface="Algerian" panose="04020705040A02060702"/>
+              </a:rPr>
+              <a:t>SOFTWARE REQUIREMENTS</a:t>
+            </a:r>
+            <a:endParaRPr lang="en-US" altLang="en-GB" sz="3400" u="sng">
+              <a:latin typeface="Algerian" panose="04020705040A02060702"/>
+              <a:ea typeface="Algerian" panose="04020705040A02060702"/>
+              <a:cs typeface="Algerian" panose="04020705040A02060702"/>
+              <a:sym typeface="Algerian" panose="04020705040A02060702"/>
+            </a:endParaRPr>
+          </a:p>
+        </p:txBody>
+      </p:sp>
+      <p:sp>
+        <p:nvSpPr>
+          <p:cNvPr id="55" name="Google Shape;55;p14"/>
+          <p:cNvSpPr txBox="1"/>
+          <p:nvPr>
+            <p:ph type="body" idx="1"/>
+          </p:nvPr>
+        </p:nvSpPr>
+        <p:spPr>
+          <a:xfrm>
+            <a:off x="107315" y="1278255"/>
+            <a:ext cx="8943975" cy="3806825"/>
+          </a:xfrm>
+          <a:prstGeom prst="rect">
+            <a:avLst/>
+          </a:prstGeom>
+        </p:spPr>
+        <p:txBody>
+          <a:bodyPr spcFirstLastPara="1" wrap="square" lIns="91425" tIns="45700" rIns="91425" bIns="45700" anchor="t" anchorCtr="0">
+            <a:noAutofit/>
+          </a:bodyPr>
+          <a:lstStyle/>
+          <a:p>
+            <a:pPr lvl="0" algn="l" rtl="0">
+              <a:lnSpc>
+                <a:spcPct val="150000"/>
+              </a:lnSpc>
+              <a:spcBef>
+                <a:spcPts val="360"/>
+              </a:spcBef>
+              <a:spcAft>
+                <a:spcPts val="0"/>
+              </a:spcAft>
+              <a:buSzPts val="1800"/>
+              <a:buFont typeface="Wingdings" panose="05000000000000000000" charset="0"/>
+              <a:buChar char="q"/>
+            </a:pPr>
+            <a:r>
+              <a:rPr lang="en-US" sz="1800">
+                <a:latin typeface="Comic Sans MS" panose="030F0702030302020204" charset="0"/>
+                <a:cs typeface="Comic Sans MS" panose="030F0702030302020204" charset="0"/>
+              </a:rPr>
+              <a:t>FrontEnd - React.js, Bootstrap, CSS</a:t>
+            </a:r>
+            <a:endParaRPr lang="en-US" sz="1800">
+              <a:latin typeface="Comic Sans MS" panose="030F0702030302020204" charset="0"/>
+              <a:cs typeface="Comic Sans MS" panose="030F0702030302020204" charset="0"/>
+            </a:endParaRPr>
+          </a:p>
+          <a:p>
+            <a:pPr lvl="0" algn="l" rtl="0">
+              <a:lnSpc>
+                <a:spcPct val="150000"/>
+              </a:lnSpc>
+              <a:spcBef>
+                <a:spcPts val="360"/>
+              </a:spcBef>
+              <a:spcAft>
+                <a:spcPts val="0"/>
+              </a:spcAft>
+              <a:buSzPts val="1800"/>
+              <a:buFont typeface="Wingdings" panose="05000000000000000000" charset="0"/>
+              <a:buChar char="q"/>
+            </a:pPr>
+            <a:r>
+              <a:rPr lang="en-US" sz="1800">
+                <a:latin typeface="Comic Sans MS" panose="030F0702030302020204" charset="0"/>
+                <a:cs typeface="Comic Sans MS" panose="030F0702030302020204" charset="0"/>
+              </a:rPr>
+              <a:t>BackEnd - Node.js, Express.js</a:t>
+            </a:r>
+            <a:endParaRPr lang="en-US" sz="1800">
+              <a:latin typeface="Comic Sans MS" panose="030F0702030302020204" charset="0"/>
+              <a:cs typeface="Comic Sans MS" panose="030F0702030302020204" charset="0"/>
+            </a:endParaRPr>
+          </a:p>
+          <a:p>
+            <a:pPr lvl="0" algn="l" rtl="0">
+              <a:lnSpc>
+                <a:spcPct val="150000"/>
+              </a:lnSpc>
+              <a:spcBef>
+                <a:spcPts val="360"/>
+              </a:spcBef>
+              <a:spcAft>
+                <a:spcPts val="0"/>
+              </a:spcAft>
+              <a:buSzPts val="1800"/>
+              <a:buFont typeface="Wingdings" panose="05000000000000000000" charset="0"/>
+              <a:buChar char="q"/>
+            </a:pPr>
+            <a:r>
+              <a:rPr lang="en-US" sz="1800">
+                <a:latin typeface="Comic Sans MS" panose="030F0702030302020204" charset="0"/>
+                <a:cs typeface="Comic Sans MS" panose="030F0702030302020204" charset="0"/>
+              </a:rPr>
+              <a:t>Database - MongoDB atlas</a:t>
+            </a:r>
+            <a:endParaRPr lang="en-US" sz="1800">
+              <a:latin typeface="Comic Sans MS" panose="030F0702030302020204" charset="0"/>
+              <a:cs typeface="Comic Sans MS" panose="030F0702030302020204" charset="0"/>
+            </a:endParaRPr>
+          </a:p>
+          <a:p>
+            <a:pPr lvl="0" algn="l" rtl="0">
+              <a:lnSpc>
+                <a:spcPct val="150000"/>
+              </a:lnSpc>
+              <a:spcBef>
+                <a:spcPts val="360"/>
+              </a:spcBef>
+              <a:spcAft>
+                <a:spcPts val="0"/>
+              </a:spcAft>
+              <a:buSzPts val="1800"/>
+              <a:buFont typeface="Wingdings" panose="05000000000000000000" charset="0"/>
+              <a:buChar char="q"/>
+            </a:pPr>
+            <a:r>
+              <a:rPr lang="en-US" sz="1800">
+                <a:latin typeface="Comic Sans MS" panose="030F0702030302020204" charset="0"/>
+                <a:cs typeface="Comic Sans MS" panose="030F0702030302020204" charset="0"/>
+              </a:rPr>
+              <a:t>Source Code editor- Visual Studio COde</a:t>
+            </a:r>
+            <a:endParaRPr lang="en-US" sz="1800">
+              <a:latin typeface="Comic Sans MS" panose="030F0702030302020204" charset="0"/>
+              <a:cs typeface="Comic Sans MS" panose="030F0702030302020204" charset="0"/>
+            </a:endParaRPr>
+          </a:p>
+          <a:p>
+            <a:pPr lvl="0" algn="l" rtl="0">
+              <a:lnSpc>
+                <a:spcPct val="150000"/>
+              </a:lnSpc>
+              <a:spcBef>
+                <a:spcPts val="360"/>
+              </a:spcBef>
+              <a:spcAft>
+                <a:spcPts val="0"/>
+              </a:spcAft>
+              <a:buSzPts val="1800"/>
+              <a:buFont typeface="Wingdings" panose="05000000000000000000" charset="0"/>
+              <a:buChar char="q"/>
+            </a:pPr>
+            <a:r>
+              <a:rPr lang="en-US" sz="1800">
+                <a:latin typeface="Comic Sans MS" panose="030F0702030302020204" charset="0"/>
+                <a:cs typeface="Comic Sans MS" panose="030F0702030302020204" charset="0"/>
+              </a:rPr>
+              <a:t>Local Host Browser - Firefox</a:t>
+            </a:r>
+            <a:endParaRPr lang="en-US" sz="1800">
+              <a:latin typeface="Comic Sans MS" panose="030F0702030302020204" charset="0"/>
+              <a:cs typeface="Comic Sans MS" panose="030F0702030302020204" charset="0"/>
+            </a:endParaRPr>
+          </a:p>
+          <a:p>
+            <a:pPr lvl="0" algn="l" rtl="0">
+              <a:lnSpc>
+                <a:spcPct val="150000"/>
+              </a:lnSpc>
+              <a:spcBef>
+                <a:spcPts val="360"/>
+              </a:spcBef>
+              <a:spcAft>
+                <a:spcPts val="0"/>
+              </a:spcAft>
+              <a:buSzPts val="1800"/>
+              <a:buFont typeface="Wingdings" panose="05000000000000000000" charset="0"/>
+              <a:buChar char="q"/>
+            </a:pPr>
+            <a:r>
+              <a:rPr lang="en-US" sz="1800">
+                <a:latin typeface="Comic Sans MS" panose="030F0702030302020204" charset="0"/>
+                <a:cs typeface="Comic Sans MS" panose="030F0702030302020204" charset="0"/>
+              </a:rPr>
+              <a:t>Windows Version - Windows 10 version and above</a:t>
+            </a:r>
+            <a:endParaRPr lang="en-US" sz="1800">
+              <a:latin typeface="Comic Sans MS" panose="030F0702030302020204" charset="0"/>
+              <a:cs typeface="Comic Sans MS" panose="030F0702030302020204" charset="0"/>
+            </a:endParaRPr>
+          </a:p>
+          <a:p>
+            <a:pPr lvl="0" algn="l" rtl="0">
+              <a:lnSpc>
+                <a:spcPct val="150000"/>
+              </a:lnSpc>
+              <a:spcBef>
+                <a:spcPts val="360"/>
+              </a:spcBef>
+              <a:spcAft>
+                <a:spcPts val="0"/>
+              </a:spcAft>
+              <a:buSzPts val="1800"/>
+              <a:buFont typeface="Wingdings" panose="05000000000000000000" charset="0"/>
+              <a:buChar char="q"/>
+            </a:pPr>
+            <a:r>
+              <a:rPr lang="en-US" sz="1800">
+                <a:latin typeface="Comic Sans MS" panose="030F0702030302020204" charset="0"/>
+                <a:cs typeface="Comic Sans MS" panose="030F0702030302020204" charset="0"/>
+              </a:rPr>
+              <a:t>Repository hosting - GitHub</a:t>
+            </a:r>
+            <a:endParaRPr lang="en-US" sz="1800">
+              <a:latin typeface="Comic Sans MS" panose="030F0702030302020204" charset="0"/>
+              <a:cs typeface="Comic Sans MS" panose="030F0702030302020204" charset="0"/>
+            </a:endParaRPr>
+          </a:p>
+        </p:txBody>
+      </p:sp>
+    </p:spTree>
+  </p:cSld>
+  <p:clrMapOvr>
+    <a:masterClrMapping/>
+  </p:clrMapOvr>
+</p:sld>
+</file>
+
+<file path=ppt/slides/slide11.xml><?xml version="1.0" encoding="utf-8"?>
 <p:sld xmlns:a="http://schemas.openxmlformats.org/drawingml/2006/main" xmlns:r="http://schemas.openxmlformats.org/officeDocument/2006/relationships" xmlns:p="http://schemas.openxmlformats.org/presentationml/2006/main">
   <p:cSld>
     <p:bg>
@@ -8358,301 +9057,6 @@
 </p:sld>
 </file>
 
-<file path=ppt/slides/slide11.xml><?xml version="1.0" encoding="utf-8"?>
-<p:sld xmlns:a="http://schemas.openxmlformats.org/drawingml/2006/main" xmlns:r="http://schemas.openxmlformats.org/officeDocument/2006/relationships" xmlns:p="http://schemas.openxmlformats.org/presentationml/2006/main">
-  <p:cSld>
-    <p:bg>
-      <p:bgPr>
-        <a:blipFill rotWithShape="1">
-          <a:blip r:embed="rId1"/>
-          <a:stretch>
-            <a:fillRect/>
-          </a:stretch>
-        </a:blipFill>
-        <a:effectLst/>
-      </p:bgPr>
-    </p:bg>
-    <p:spTree>
-      <p:nvGrpSpPr>
-        <p:cNvPr id="53" name="Shape 53"/>
-        <p:cNvGrpSpPr/>
-        <p:nvPr/>
-      </p:nvGrpSpPr>
-      <p:grpSpPr>
-        <a:xfrm>
-          <a:off x="0" y="0"/>
-          <a:ext cx="0" cy="0"/>
-          <a:chOff x="0" y="0"/>
-          <a:chExt cx="0" cy="0"/>
-        </a:xfrm>
-      </p:grpSpPr>
-      <p:sp>
-        <p:nvSpPr>
-          <p:cNvPr id="54" name="Google Shape;54;p14"/>
-          <p:cNvSpPr txBox="1"/>
-          <p:nvPr>
-            <p:ph type="title"/>
-          </p:nvPr>
-        </p:nvSpPr>
-        <p:spPr>
-          <a:xfrm>
-            <a:off x="793150" y="212383"/>
-            <a:ext cx="6408600" cy="637500"/>
-          </a:xfrm>
-          <a:prstGeom prst="rect">
-            <a:avLst/>
-          </a:prstGeom>
-        </p:spPr>
-        <p:txBody>
-          <a:bodyPr spcFirstLastPara="1" wrap="square" lIns="91425" tIns="45700" rIns="91425" bIns="45700" anchor="ctr" anchorCtr="0">
-            <a:noAutofit/>
-          </a:bodyPr>
-          <a:lstStyle/>
-          <a:p>
-            <a:pPr marL="0" lvl="0" indent="0" algn="l" rtl="0">
-              <a:spcBef>
-                <a:spcPts val="0"/>
-              </a:spcBef>
-              <a:spcAft>
-                <a:spcPts val="0"/>
-              </a:spcAft>
-              <a:buNone/>
-            </a:pPr>
-            <a:r>
-              <a:rPr lang="en-US" altLang="en-GB" sz="3400" u="sng">
-                <a:latin typeface="Algerian" panose="04020705040A02060702"/>
-                <a:ea typeface="Algerian" panose="04020705040A02060702"/>
-                <a:cs typeface="Algerian" panose="04020705040A02060702"/>
-                <a:sym typeface="Algerian" panose="04020705040A02060702"/>
-              </a:rPr>
-              <a:t>technologies </a:t>
-            </a:r>
-            <a:r>
-              <a:rPr lang="en-US" sz="3400" u="sng">
-                <a:latin typeface="Algerian" panose="04020705040A02060702"/>
-                <a:ea typeface="Algerian" panose="04020705040A02060702"/>
-                <a:cs typeface="Algerian" panose="04020705040A02060702"/>
-                <a:sym typeface="Algerian" panose="04020705040A02060702"/>
-              </a:rPr>
-              <a:t>to be used</a:t>
-            </a:r>
-            <a:endParaRPr lang="en-US" sz="3400" u="sng">
-              <a:latin typeface="Algerian" panose="04020705040A02060702"/>
-              <a:ea typeface="Algerian" panose="04020705040A02060702"/>
-              <a:cs typeface="Algerian" panose="04020705040A02060702"/>
-              <a:sym typeface="Algerian" panose="04020705040A02060702"/>
-            </a:endParaRPr>
-          </a:p>
-        </p:txBody>
-      </p:sp>
-      <p:sp>
-        <p:nvSpPr>
-          <p:cNvPr id="55" name="Google Shape;55;p14"/>
-          <p:cNvSpPr txBox="1"/>
-          <p:nvPr>
-            <p:ph type="body" idx="1"/>
-          </p:nvPr>
-        </p:nvSpPr>
-        <p:spPr>
-          <a:xfrm>
-            <a:off x="484505" y="1297305"/>
-            <a:ext cx="3804920" cy="3423920"/>
-          </a:xfrm>
-          <a:prstGeom prst="rect">
-            <a:avLst/>
-          </a:prstGeom>
-        </p:spPr>
-        <p:txBody>
-          <a:bodyPr spcFirstLastPara="1" wrap="square" lIns="91425" tIns="45700" rIns="91425" bIns="45700" anchor="t" anchorCtr="0">
-            <a:noAutofit/>
-          </a:bodyPr>
-          <a:lstStyle/>
-          <a:p>
-            <a:pPr algn="l">
-              <a:lnSpc>
-                <a:spcPct val="150000"/>
-              </a:lnSpc>
-              <a:buFont typeface="Wingdings" panose="05000000000000000000" charset="0"/>
-              <a:buChar char="q"/>
-            </a:pPr>
-            <a:r>
-              <a:rPr lang="en-US" sz="1800" spc="-24" dirty="0">
-                <a:solidFill>
-                  <a:schemeClr val="bg1"/>
-                </a:solidFill>
-                <a:latin typeface="Comic Sans MS" panose="030F0702030302020204" charset="0"/>
-                <a:ea typeface="Helmet" pitchFamily="50" charset="-128"/>
-                <a:cs typeface="Comic Sans MS" panose="030F0702030302020204" charset="0"/>
-                <a:sym typeface="+mn-ea"/>
-              </a:rPr>
-              <a:t>MongoDB                                 </a:t>
-            </a:r>
-            <a:endParaRPr lang="en-US" sz="1800" dirty="0">
-              <a:solidFill>
-                <a:schemeClr val="bg1"/>
-              </a:solidFill>
-              <a:latin typeface="Comic Sans MS" panose="030F0702030302020204" charset="0"/>
-              <a:ea typeface="Helmet" pitchFamily="50" charset="-128"/>
-              <a:cs typeface="Comic Sans MS" panose="030F0702030302020204" charset="0"/>
-            </a:endParaRPr>
-          </a:p>
-          <a:p>
-            <a:pPr algn="l">
-              <a:lnSpc>
-                <a:spcPct val="150000"/>
-              </a:lnSpc>
-              <a:buFont typeface="Wingdings" panose="05000000000000000000" charset="0"/>
-              <a:buChar char="q"/>
-            </a:pPr>
-            <a:r>
-              <a:rPr lang="en-US" sz="1800" spc="-24" dirty="0">
-                <a:solidFill>
-                  <a:schemeClr val="bg1"/>
-                </a:solidFill>
-                <a:latin typeface="Comic Sans MS" panose="030F0702030302020204" charset="0"/>
-                <a:ea typeface="Helmet" pitchFamily="50" charset="-128"/>
-                <a:cs typeface="Comic Sans MS" panose="030F0702030302020204" charset="0"/>
-                <a:sym typeface="+mn-ea"/>
-              </a:rPr>
-              <a:t>Express.js</a:t>
-            </a:r>
-            <a:endParaRPr lang="en-US" sz="1800" dirty="0">
-              <a:solidFill>
-                <a:schemeClr val="bg1"/>
-              </a:solidFill>
-              <a:latin typeface="Comic Sans MS" panose="030F0702030302020204" charset="0"/>
-              <a:ea typeface="Helmet" pitchFamily="50" charset="-128"/>
-              <a:cs typeface="Comic Sans MS" panose="030F0702030302020204" charset="0"/>
-            </a:endParaRPr>
-          </a:p>
-          <a:p>
-            <a:pPr algn="l">
-              <a:lnSpc>
-                <a:spcPct val="150000"/>
-              </a:lnSpc>
-              <a:buFont typeface="Wingdings" panose="05000000000000000000" charset="0"/>
-              <a:buChar char="q"/>
-            </a:pPr>
-            <a:r>
-              <a:rPr lang="en-US" sz="1800" spc="-24" dirty="0">
-                <a:solidFill>
-                  <a:schemeClr val="bg1"/>
-                </a:solidFill>
-                <a:latin typeface="Comic Sans MS" panose="030F0702030302020204" charset="0"/>
-                <a:ea typeface="Helmet" pitchFamily="50" charset="-128"/>
-                <a:cs typeface="Comic Sans MS" panose="030F0702030302020204" charset="0"/>
-                <a:sym typeface="+mn-ea"/>
-              </a:rPr>
-              <a:t>React.js</a:t>
-            </a:r>
-            <a:endParaRPr lang="en-US" sz="1800" dirty="0">
-              <a:solidFill>
-                <a:schemeClr val="bg1"/>
-              </a:solidFill>
-              <a:latin typeface="Comic Sans MS" panose="030F0702030302020204" charset="0"/>
-              <a:ea typeface="Helmet" pitchFamily="50" charset="-128"/>
-              <a:cs typeface="Comic Sans MS" panose="030F0702030302020204" charset="0"/>
-            </a:endParaRPr>
-          </a:p>
-          <a:p>
-            <a:pPr algn="l">
-              <a:lnSpc>
-                <a:spcPct val="150000"/>
-              </a:lnSpc>
-              <a:buFont typeface="Wingdings" panose="05000000000000000000" charset="0"/>
-              <a:buChar char="q"/>
-            </a:pPr>
-            <a:r>
-              <a:rPr lang="en-US" sz="1800" spc="-24" dirty="0">
-                <a:solidFill>
-                  <a:schemeClr val="bg1"/>
-                </a:solidFill>
-                <a:latin typeface="Comic Sans MS" panose="030F0702030302020204" charset="0"/>
-                <a:ea typeface="Helmet" pitchFamily="50" charset="-128"/>
-                <a:cs typeface="Comic Sans MS" panose="030F0702030302020204" charset="0"/>
-                <a:sym typeface="+mn-ea"/>
-              </a:rPr>
-              <a:t>Node.js</a:t>
-            </a:r>
-            <a:endParaRPr lang="en-US" sz="1800" dirty="0">
-              <a:solidFill>
-                <a:schemeClr val="bg1"/>
-              </a:solidFill>
-              <a:latin typeface="Comic Sans MS" panose="030F0702030302020204" charset="0"/>
-              <a:ea typeface="Helmet" pitchFamily="50" charset="-128"/>
-              <a:cs typeface="Comic Sans MS" panose="030F0702030302020204" charset="0"/>
-            </a:endParaRPr>
-          </a:p>
-          <a:p>
-            <a:pPr algn="l">
-              <a:lnSpc>
-                <a:spcPct val="150000"/>
-              </a:lnSpc>
-              <a:buFont typeface="Wingdings" panose="05000000000000000000" charset="0"/>
-              <a:buChar char="q"/>
-            </a:pPr>
-            <a:r>
-              <a:rPr lang="en-US" sz="1800" spc="-24" dirty="0">
-                <a:solidFill>
-                  <a:schemeClr val="bg1"/>
-                </a:solidFill>
-                <a:latin typeface="Comic Sans MS" panose="030F0702030302020204" charset="0"/>
-                <a:ea typeface="Helmet" pitchFamily="50" charset="-128"/>
-                <a:cs typeface="Comic Sans MS" panose="030F0702030302020204" charset="0"/>
-                <a:sym typeface="+mn-ea"/>
-              </a:rPr>
-              <a:t>Dotenv</a:t>
-            </a:r>
-            <a:endParaRPr lang="en-US" sz="1800" spc="-24" dirty="0">
-              <a:solidFill>
-                <a:schemeClr val="bg1"/>
-              </a:solidFill>
-              <a:latin typeface="Comic Sans MS" panose="030F0702030302020204" charset="0"/>
-              <a:ea typeface="Helmet" pitchFamily="50" charset="-128"/>
-              <a:cs typeface="Comic Sans MS" panose="030F0702030302020204" charset="0"/>
-              <a:sym typeface="+mn-ea"/>
-            </a:endParaRPr>
-          </a:p>
-          <a:p>
-            <a:pPr algn="l">
-              <a:lnSpc>
-                <a:spcPct val="150000"/>
-              </a:lnSpc>
-              <a:buFont typeface="Wingdings" panose="05000000000000000000" charset="0"/>
-              <a:buChar char="q"/>
-            </a:pPr>
-            <a:r>
-              <a:rPr lang="en-US" sz="1800" spc="-24" dirty="0">
-                <a:solidFill>
-                  <a:schemeClr val="bg1"/>
-                </a:solidFill>
-                <a:latin typeface="Comic Sans MS" panose="030F0702030302020204" charset="0"/>
-                <a:ea typeface="Helmet" pitchFamily="50" charset="-128"/>
-                <a:cs typeface="Comic Sans MS" panose="030F0702030302020204" charset="0"/>
-                <a:sym typeface="+mn-ea"/>
-              </a:rPr>
-              <a:t>Bootstrap</a:t>
-            </a:r>
-            <a:endParaRPr lang="en-US" sz="1800" spc="-24" dirty="0">
-              <a:solidFill>
-                <a:schemeClr val="bg1"/>
-              </a:solidFill>
-              <a:latin typeface="Comic Sans MS" panose="030F0702030302020204" charset="0"/>
-              <a:ea typeface="Helmet" pitchFamily="50" charset="-128"/>
-              <a:cs typeface="Comic Sans MS" panose="030F0702030302020204" charset="0"/>
-              <a:sym typeface="+mn-ea"/>
-            </a:endParaRPr>
-          </a:p>
-        </p:txBody>
-      </p:sp>
-    </p:spTree>
-  </p:cSld>
-  <p:clrMapOvr>
-    <a:masterClrMapping/>
-  </p:clrMapOvr>
-</p:sld>
-</file>
-
 <file path=ppt/slides/slide12.xml><?xml version="1.0" encoding="utf-8"?>
 <p:sld xmlns:a="http://schemas.openxmlformats.org/drawingml/2006/main" xmlns:r="http://schemas.openxmlformats.org/officeDocument/2006/relationships" xmlns:p="http://schemas.openxmlformats.org/presentationml/2006/main">
   <p:cSld>
@@ -8704,7 +9108,7 @@
           </a:bodyPr>
           <a:lstStyle/>
           <a:p>
-            <a:pPr marL="0" lvl="0" indent="0" algn="l" rtl="0">
+            <a:pPr marL="0" lvl="0" indent="0" algn="ctr" rtl="0">
               <a:spcBef>
                 <a:spcPts val="0"/>
               </a:spcBef>
@@ -8923,7 +9327,7 @@
           </a:bodyPr>
           <a:lstStyle/>
           <a:p>
-            <a:pPr marL="0" lvl="0" indent="0" algn="l" rtl="0">
+            <a:pPr marL="0" lvl="0" indent="0" algn="ctr" rtl="0">
               <a:spcBef>
                 <a:spcPts val="0"/>
               </a:spcBef>
@@ -9135,7 +9539,7 @@
           </a:bodyPr>
           <a:lstStyle/>
           <a:p>
-            <a:pPr marL="0" lvl="0" indent="0" algn="l" rtl="0">
+            <a:pPr marL="0" lvl="0" indent="0" algn="ctr" rtl="0">
               <a:spcBef>
                 <a:spcPts val="0"/>
               </a:spcBef>
@@ -9394,7 +9798,7 @@
           </a:bodyPr>
           <a:lstStyle/>
           <a:p>
-            <a:pPr marL="0" lvl="0" indent="0" algn="l" rtl="0">
+            <a:pPr marL="0" lvl="0" indent="0" algn="ctr" rtl="0">
               <a:spcBef>
                 <a:spcPts val="0"/>
               </a:spcBef>
@@ -9609,6 +10013,311 @@
 </file>
 
 <file path=ppt/slides/slide16.xml><?xml version="1.0" encoding="utf-8"?>
+<p:sld xmlns:a="http://schemas.openxmlformats.org/drawingml/2006/main" xmlns:r="http://schemas.openxmlformats.org/officeDocument/2006/relationships" xmlns:p="http://schemas.openxmlformats.org/presentationml/2006/main">
+  <p:cSld>
+    <p:bg>
+      <p:bgPr>
+        <a:blipFill rotWithShape="1">
+          <a:blip r:embed="rId1"/>
+          <a:stretch>
+            <a:fillRect/>
+          </a:stretch>
+        </a:blipFill>
+        <a:effectLst/>
+      </p:bgPr>
+    </p:bg>
+    <p:spTree>
+      <p:nvGrpSpPr>
+        <p:cNvPr id="53" name="Shape 53"/>
+        <p:cNvGrpSpPr/>
+        <p:nvPr/>
+      </p:nvGrpSpPr>
+      <p:grpSpPr>
+        <a:xfrm>
+          <a:off x="0" y="0"/>
+          <a:ext cx="0" cy="0"/>
+          <a:chOff x="0" y="0"/>
+          <a:chExt cx="0" cy="0"/>
+        </a:xfrm>
+      </p:grpSpPr>
+      <p:pic>
+        <p:nvPicPr>
+          <p:cNvPr id="1" name="Picture Placeholder 0" descr="signup"/>
+          <p:cNvPicPr>
+            <a:picLocks noChangeAspect="1"/>
+          </p:cNvPicPr>
+          <p:nvPr>
+            <p:ph type="pic" idx="2"/>
+          </p:nvPr>
+        </p:nvPicPr>
+        <p:blipFill>
+          <a:blip r:embed="rId2"/>
+          <a:stretch>
+            <a:fillRect/>
+          </a:stretch>
+        </p:blipFill>
+        <p:spPr>
+          <a:xfrm>
+            <a:off x="1388745" y="1080770"/>
+            <a:ext cx="6551417" cy="3096000"/>
+          </a:xfrm>
+          <a:prstGeom prst="rect">
+            <a:avLst/>
+          </a:prstGeom>
+        </p:spPr>
+      </p:pic>
+      <p:sp>
+        <p:nvSpPr>
+          <p:cNvPr id="4" name="Text Box 3"/>
+          <p:cNvSpPr txBox="1"/>
+          <p:nvPr/>
+        </p:nvSpPr>
+        <p:spPr>
+          <a:xfrm>
+            <a:off x="405130" y="320675"/>
+            <a:ext cx="8375015" cy="695960"/>
+          </a:xfrm>
+          <a:prstGeom prst="rect">
+            <a:avLst/>
+          </a:prstGeom>
+          <a:noFill/>
+        </p:spPr>
+        <p:txBody>
+          <a:bodyPr wrap="square" rtlCol="0">
+            <a:noAutofit/>
+          </a:bodyPr>
+          <a:p>
+            <a:pPr algn="ctr"/>
+            <a:r>
+              <a:rPr lang="en-US" altLang="en-GB" sz="3400" u="sng">
+                <a:solidFill>
+                  <a:schemeClr val="bg1"/>
+                </a:solidFill>
+                <a:latin typeface="Algerian" panose="04020705040A02060702"/>
+                <a:ea typeface="Algerian" panose="04020705040A02060702"/>
+                <a:cs typeface="Algerian" panose="04020705040A02060702"/>
+                <a:sym typeface="Algerian" panose="04020705040A02060702"/>
+              </a:rPr>
+              <a:t>OUTPUT SCREENSHOTS</a:t>
+            </a:r>
+            <a:endParaRPr lang="en-US" altLang="en-GB" sz="3400" u="sng">
+              <a:solidFill>
+                <a:schemeClr val="bg1"/>
+              </a:solidFill>
+              <a:latin typeface="Algerian" panose="04020705040A02060702"/>
+              <a:ea typeface="Algerian" panose="04020705040A02060702"/>
+              <a:cs typeface="Algerian" panose="04020705040A02060702"/>
+              <a:sym typeface="Algerian" panose="04020705040A02060702"/>
+            </a:endParaRPr>
+          </a:p>
+          <a:p>
+            <a:endParaRPr lang="en-US" altLang="en-GB" sz="3400" u="sng">
+              <a:solidFill>
+                <a:schemeClr val="bg1"/>
+              </a:solidFill>
+              <a:latin typeface="Algerian" panose="04020705040A02060702"/>
+              <a:ea typeface="Algerian" panose="04020705040A02060702"/>
+              <a:cs typeface="Algerian" panose="04020705040A02060702"/>
+              <a:sym typeface="Algerian" panose="04020705040A02060702"/>
+            </a:endParaRPr>
+          </a:p>
+        </p:txBody>
+      </p:sp>
+      <p:sp>
+        <p:nvSpPr>
+          <p:cNvPr id="5" name="Text Box 4"/>
+          <p:cNvSpPr txBox="1"/>
+          <p:nvPr/>
+        </p:nvSpPr>
+        <p:spPr>
+          <a:xfrm>
+            <a:off x="3822065" y="4323080"/>
+            <a:ext cx="1593215" cy="368300"/>
+          </a:xfrm>
+          <a:prstGeom prst="rect">
+            <a:avLst/>
+          </a:prstGeom>
+          <a:noFill/>
+        </p:spPr>
+        <p:txBody>
+          <a:bodyPr wrap="square" rtlCol="0">
+            <a:spAutoFit/>
+          </a:bodyPr>
+          <a:p>
+            <a:r>
+              <a:rPr lang="en-US" sz="1800">
+                <a:solidFill>
+                  <a:schemeClr val="bg1"/>
+                </a:solidFill>
+                <a:latin typeface="Comic Sans MS" panose="030F0702030302020204" charset="0"/>
+                <a:cs typeface="Comic Sans MS" panose="030F0702030302020204" charset="0"/>
+              </a:rPr>
+              <a:t>Sign Up Page</a:t>
+            </a:r>
+            <a:endParaRPr lang="en-US" sz="1800">
+              <a:solidFill>
+                <a:schemeClr val="bg1"/>
+              </a:solidFill>
+              <a:latin typeface="Comic Sans MS" panose="030F0702030302020204" charset="0"/>
+              <a:cs typeface="Comic Sans MS" panose="030F0702030302020204" charset="0"/>
+            </a:endParaRPr>
+          </a:p>
+        </p:txBody>
+      </p:sp>
+    </p:spTree>
+  </p:cSld>
+  <p:clrMapOvr>
+    <a:masterClrMapping/>
+  </p:clrMapOvr>
+</p:sld>
+</file>
+
+<file path=ppt/slides/slide17.xml><?xml version="1.0" encoding="utf-8"?>
+<p:sld xmlns:a="http://schemas.openxmlformats.org/drawingml/2006/main" xmlns:r="http://schemas.openxmlformats.org/officeDocument/2006/relationships" xmlns:p="http://schemas.openxmlformats.org/presentationml/2006/main">
+  <p:cSld>
+    <p:bg>
+      <p:bgPr>
+        <a:blipFill rotWithShape="1">
+          <a:blip r:embed="rId1"/>
+          <a:stretch>
+            <a:fillRect/>
+          </a:stretch>
+        </a:blipFill>
+        <a:effectLst/>
+      </p:bgPr>
+    </p:bg>
+    <p:spTree>
+      <p:nvGrpSpPr>
+        <p:cNvPr id="53" name="Shape 53"/>
+        <p:cNvGrpSpPr/>
+        <p:nvPr/>
+      </p:nvGrpSpPr>
+      <p:grpSpPr>
+        <a:xfrm>
+          <a:off x="0" y="0"/>
+          <a:ext cx="0" cy="0"/>
+          <a:chOff x="0" y="0"/>
+          <a:chExt cx="0" cy="0"/>
+        </a:xfrm>
+      </p:grpSpPr>
+      <p:sp>
+        <p:nvSpPr>
+          <p:cNvPr id="4" name="Text Box 3"/>
+          <p:cNvSpPr txBox="1"/>
+          <p:nvPr/>
+        </p:nvSpPr>
+        <p:spPr>
+          <a:xfrm>
+            <a:off x="405130" y="320675"/>
+            <a:ext cx="8169275" cy="614045"/>
+          </a:xfrm>
+          <a:prstGeom prst="rect">
+            <a:avLst/>
+          </a:prstGeom>
+          <a:noFill/>
+        </p:spPr>
+        <p:txBody>
+          <a:bodyPr wrap="square" rtlCol="0">
+            <a:spAutoFit/>
+          </a:bodyPr>
+          <a:p>
+            <a:pPr algn="ctr"/>
+            <a:r>
+              <a:rPr lang="en-US" sz="3400" u="sng">
+                <a:solidFill>
+                  <a:schemeClr val="bg1"/>
+                </a:solidFill>
+                <a:latin typeface="Algerian" panose="04020705040A02060702" charset="0"/>
+                <a:cs typeface="Algerian" panose="04020705040A02060702" charset="0"/>
+              </a:rPr>
+              <a:t>output screenshots...</a:t>
+            </a:r>
+            <a:endParaRPr lang="en-US" sz="3400" u="sng">
+              <a:solidFill>
+                <a:schemeClr val="bg1"/>
+              </a:solidFill>
+              <a:latin typeface="Algerian" panose="04020705040A02060702" charset="0"/>
+              <a:cs typeface="Algerian" panose="04020705040A02060702" charset="0"/>
+            </a:endParaRPr>
+          </a:p>
+        </p:txBody>
+      </p:sp>
+      <p:sp>
+        <p:nvSpPr>
+          <p:cNvPr id="5" name="Text Box 4"/>
+          <p:cNvSpPr txBox="1"/>
+          <p:nvPr/>
+        </p:nvSpPr>
+        <p:spPr>
+          <a:xfrm>
+            <a:off x="3822065" y="4323080"/>
+            <a:ext cx="1593215" cy="368300"/>
+          </a:xfrm>
+          <a:prstGeom prst="rect">
+            <a:avLst/>
+          </a:prstGeom>
+          <a:noFill/>
+        </p:spPr>
+        <p:txBody>
+          <a:bodyPr wrap="square" rtlCol="0">
+            <a:spAutoFit/>
+          </a:bodyPr>
+          <a:p>
+            <a:r>
+              <a:rPr lang="en-US" sz="1800">
+                <a:solidFill>
+                  <a:schemeClr val="bg1"/>
+                </a:solidFill>
+                <a:latin typeface="Comic Sans MS" panose="030F0702030302020204" charset="0"/>
+                <a:cs typeface="Comic Sans MS" panose="030F0702030302020204" charset="0"/>
+              </a:rPr>
+              <a:t>Login Page</a:t>
+            </a:r>
+            <a:endParaRPr lang="en-US" sz="1800">
+              <a:solidFill>
+                <a:schemeClr val="bg1"/>
+              </a:solidFill>
+              <a:latin typeface="Comic Sans MS" panose="030F0702030302020204" charset="0"/>
+              <a:cs typeface="Comic Sans MS" panose="030F0702030302020204" charset="0"/>
+            </a:endParaRPr>
+          </a:p>
+        </p:txBody>
+      </p:sp>
+      <p:pic>
+        <p:nvPicPr>
+          <p:cNvPr id="3" name="Picture Placeholder 2" descr="login"/>
+          <p:cNvPicPr>
+            <a:picLocks noChangeAspect="1"/>
+          </p:cNvPicPr>
+          <p:nvPr>
+            <p:ph type="pic" idx="2"/>
+          </p:nvPr>
+        </p:nvPicPr>
+        <p:blipFill>
+          <a:blip r:embed="rId2"/>
+          <a:stretch>
+            <a:fillRect/>
+          </a:stretch>
+        </p:blipFill>
+        <p:spPr>
+          <a:xfrm>
+            <a:off x="1539875" y="1139190"/>
+            <a:ext cx="6349281" cy="3060000"/>
+          </a:xfrm>
+          <a:prstGeom prst="rect">
+            <a:avLst/>
+          </a:prstGeom>
+        </p:spPr>
+      </p:pic>
+    </p:spTree>
+  </p:cSld>
+  <p:clrMapOvr>
+    <a:masterClrMapping/>
+  </p:clrMapOvr>
+</p:sld>
+</file>
+
+<file path=ppt/slides/slide18.xml><?xml version="1.0" encoding="utf-8"?>
 <p:sld xmlns:a="http://schemas.openxmlformats.org/drawingml/2006/main" xmlns:r="http://schemas.openxmlformats.org/officeDocument/2006/relationships" xmlns:p="http://schemas.openxmlformats.org/presentationml/2006/main">
   <p:cSld>
     <p:bg>
@@ -9659,7 +10368,7 @@
           </a:bodyPr>
           <a:lstStyle/>
           <a:p>
-            <a:pPr marL="0" lvl="0" indent="0" algn="l" rtl="0">
+            <a:pPr marL="0" lvl="0" indent="0" algn="ctr" rtl="0">
               <a:spcBef>
                 <a:spcPts val="0"/>
               </a:spcBef>
@@ -9826,7 +10535,7 @@
 </p:sld>
 </file>
 
-<file path=ppt/slides/slide17.xml><?xml version="1.0" encoding="utf-8"?>
+<file path=ppt/slides/slide19.xml><?xml version="1.0" encoding="utf-8"?>
 <p:sld xmlns:a="http://schemas.openxmlformats.org/drawingml/2006/main" xmlns:r="http://schemas.openxmlformats.org/officeDocument/2006/relationships" xmlns:p="http://schemas.openxmlformats.org/presentationml/2006/main">
   <p:cSld>
     <p:bg>
@@ -9877,7 +10586,7 @@
           </a:bodyPr>
           <a:lstStyle/>
           <a:p>
-            <a:pPr marL="0" lvl="0" indent="0" algn="l" rtl="0">
+            <a:pPr marL="0" lvl="0" indent="0" algn="ctr" rtl="0">
               <a:spcBef>
                 <a:spcPts val="0"/>
               </a:spcBef>
@@ -10038,7 +10747,7 @@
 </p:sld>
 </file>
 
-<file path=ppt/slides/slide18.xml><?xml version="1.0" encoding="utf-8"?>
+<file path=ppt/slides/slide2.xml><?xml version="1.0" encoding="utf-8"?>
 <p:sld xmlns:a="http://schemas.openxmlformats.org/drawingml/2006/main" xmlns:r="http://schemas.openxmlformats.org/officeDocument/2006/relationships" xmlns:p="http://schemas.openxmlformats.org/presentationml/2006/main">
   <p:cSld>
     <p:bg>
@@ -10076,8 +10785,8 @@
         </p:nvSpPr>
         <p:spPr>
           <a:xfrm>
-            <a:off x="793150" y="212383"/>
-            <a:ext cx="6408600" cy="637500"/>
+            <a:off x="156845" y="212090"/>
+            <a:ext cx="8752205" cy="637540"/>
           </a:xfrm>
           <a:prstGeom prst="rect">
             <a:avLst/>
@@ -10089,7 +10798,872 @@
           </a:bodyPr>
           <a:lstStyle/>
           <a:p>
-            <a:pPr marL="0" lvl="0" indent="0" algn="l" rtl="0">
+            <a:pPr marL="0" lvl="0" indent="0" algn="ctr" rtl="0">
+              <a:spcBef>
+                <a:spcPts val="0"/>
+              </a:spcBef>
+              <a:spcAft>
+                <a:spcPts val="0"/>
+              </a:spcAft>
+              <a:buNone/>
+            </a:pPr>
+            <a:r>
+              <a:rPr lang="en-GB" sz="3400" u="sng">
+                <a:latin typeface="Algerian" panose="04020705040A02060702"/>
+                <a:ea typeface="Algerian" panose="04020705040A02060702"/>
+                <a:cs typeface="Algerian" panose="04020705040A02060702"/>
+                <a:sym typeface="Algerian" panose="04020705040A02060702"/>
+              </a:rPr>
+              <a:t>Overview </a:t>
+            </a:r>
+            <a:endParaRPr sz="3400" u="sng">
+              <a:latin typeface="Algerian" panose="04020705040A02060702"/>
+              <a:ea typeface="Algerian" panose="04020705040A02060702"/>
+              <a:cs typeface="Algerian" panose="04020705040A02060702"/>
+              <a:sym typeface="Algerian" panose="04020705040A02060702"/>
+            </a:endParaRPr>
+          </a:p>
+        </p:txBody>
+      </p:sp>
+      <p:sp>
+        <p:nvSpPr>
+          <p:cNvPr id="55" name="Google Shape;55;p14"/>
+          <p:cNvSpPr txBox="1"/>
+          <p:nvPr>
+            <p:ph type="body" idx="1"/>
+          </p:nvPr>
+        </p:nvSpPr>
+        <p:spPr>
+          <a:xfrm>
+            <a:off x="156210" y="1127125"/>
+            <a:ext cx="4091305" cy="3324225"/>
+          </a:xfrm>
+          <a:prstGeom prst="rect">
+            <a:avLst/>
+          </a:prstGeom>
+        </p:spPr>
+        <p:txBody>
+          <a:bodyPr spcFirstLastPara="1" wrap="square" lIns="91425" tIns="45700" rIns="91425" bIns="45700" anchor="t" anchorCtr="0">
+            <a:noAutofit/>
+          </a:bodyPr>
+          <a:lstStyle/>
+          <a:p>
+            <a:pPr lvl="0" algn="l" rtl="0">
+              <a:lnSpc>
+                <a:spcPct val="150000"/>
+              </a:lnSpc>
+              <a:spcBef>
+                <a:spcPts val="360"/>
+              </a:spcBef>
+              <a:spcAft>
+                <a:spcPts val="0"/>
+              </a:spcAft>
+              <a:buSzPts val="1800"/>
+              <a:buFont typeface="Wingdings" panose="05000000000000000000" charset="0"/>
+              <a:buChar char="q"/>
+            </a:pPr>
+            <a:r>
+              <a:rPr lang="en-GB" sz="2000">
+                <a:latin typeface="Comic Sans MS" panose="030F0702030302020204" charset="0"/>
+                <a:cs typeface="Comic Sans MS" panose="030F0702030302020204" charset="0"/>
+              </a:rPr>
+              <a:t>Introduction</a:t>
+            </a:r>
+            <a:endParaRPr lang="en-GB" sz="2000">
+              <a:latin typeface="Comic Sans MS" panose="030F0702030302020204" charset="0"/>
+              <a:cs typeface="Comic Sans MS" panose="030F0702030302020204" charset="0"/>
+            </a:endParaRPr>
+          </a:p>
+          <a:p>
+            <a:pPr lvl="0" algn="l" rtl="0">
+              <a:lnSpc>
+                <a:spcPct val="150000"/>
+              </a:lnSpc>
+              <a:spcBef>
+                <a:spcPts val="360"/>
+              </a:spcBef>
+              <a:spcAft>
+                <a:spcPts val="0"/>
+              </a:spcAft>
+              <a:buSzPts val="1800"/>
+              <a:buFont typeface="Wingdings" panose="05000000000000000000" charset="0"/>
+              <a:buChar char="q"/>
+            </a:pPr>
+            <a:r>
+              <a:rPr lang="en-US" altLang="en-GB" sz="2000">
+                <a:latin typeface="Comic Sans MS" panose="030F0702030302020204" charset="0"/>
+                <a:cs typeface="Comic Sans MS" panose="030F0702030302020204" charset="0"/>
+              </a:rPr>
+              <a:t>Gaps identified</a:t>
+            </a:r>
+            <a:endParaRPr lang="en-US" altLang="en-GB" sz="2000">
+              <a:latin typeface="Comic Sans MS" panose="030F0702030302020204" charset="0"/>
+              <a:cs typeface="Comic Sans MS" panose="030F0702030302020204" charset="0"/>
+            </a:endParaRPr>
+          </a:p>
+          <a:p>
+            <a:pPr lvl="0" algn="l" rtl="0">
+              <a:lnSpc>
+                <a:spcPct val="150000"/>
+              </a:lnSpc>
+              <a:spcBef>
+                <a:spcPts val="360"/>
+              </a:spcBef>
+              <a:spcAft>
+                <a:spcPts val="0"/>
+              </a:spcAft>
+              <a:buSzPts val="1800"/>
+              <a:buFont typeface="Wingdings" panose="05000000000000000000" charset="0"/>
+              <a:buChar char="q"/>
+            </a:pPr>
+            <a:r>
+              <a:rPr lang="en-US" altLang="en-GB" sz="2000">
+                <a:latin typeface="Comic Sans MS" panose="030F0702030302020204" charset="0"/>
+                <a:cs typeface="Comic Sans MS" panose="030F0702030302020204" charset="0"/>
+              </a:rPr>
+              <a:t>Objectives</a:t>
+            </a:r>
+            <a:r>
+              <a:rPr lang="en-GB" sz="2000">
+                <a:latin typeface="Comic Sans MS" panose="030F0702030302020204" charset="0"/>
+                <a:cs typeface="Comic Sans MS" panose="030F0702030302020204" charset="0"/>
+              </a:rPr>
+              <a:t> </a:t>
+            </a:r>
+            <a:endParaRPr lang="en-GB" sz="2000">
+              <a:latin typeface="Comic Sans MS" panose="030F0702030302020204" charset="0"/>
+              <a:cs typeface="Comic Sans MS" panose="030F0702030302020204" charset="0"/>
+            </a:endParaRPr>
+          </a:p>
+          <a:p>
+            <a:pPr lvl="0" algn="l" rtl="0">
+              <a:lnSpc>
+                <a:spcPct val="150000"/>
+              </a:lnSpc>
+              <a:spcBef>
+                <a:spcPts val="360"/>
+              </a:spcBef>
+              <a:spcAft>
+                <a:spcPts val="0"/>
+              </a:spcAft>
+              <a:buSzPts val="1800"/>
+              <a:buFont typeface="Wingdings" panose="05000000000000000000" charset="0"/>
+              <a:buChar char="q"/>
+            </a:pPr>
+            <a:r>
+              <a:rPr lang="en-US" altLang="en-GB" sz="2000">
+                <a:latin typeface="Comic Sans MS" panose="030F0702030302020204" charset="0"/>
+                <a:cs typeface="Comic Sans MS" panose="030F0702030302020204" charset="0"/>
+              </a:rPr>
+              <a:t>Problem Statement</a:t>
+            </a:r>
+            <a:endParaRPr lang="en-US" altLang="en-GB" sz="2000">
+              <a:latin typeface="Comic Sans MS" panose="030F0702030302020204" charset="0"/>
+              <a:cs typeface="Comic Sans MS" panose="030F0702030302020204" charset="0"/>
+            </a:endParaRPr>
+          </a:p>
+          <a:p>
+            <a:pPr lvl="0" algn="l" rtl="0">
+              <a:lnSpc>
+                <a:spcPct val="150000"/>
+              </a:lnSpc>
+              <a:spcBef>
+                <a:spcPts val="360"/>
+              </a:spcBef>
+              <a:spcAft>
+                <a:spcPts val="0"/>
+              </a:spcAft>
+              <a:buSzPts val="1800"/>
+              <a:buFont typeface="Wingdings" panose="05000000000000000000" charset="0"/>
+              <a:buChar char="q"/>
+            </a:pPr>
+            <a:r>
+              <a:rPr lang="en-US" altLang="en-GB" sz="2000">
+                <a:latin typeface="Comic Sans MS" panose="030F0702030302020204" charset="0"/>
+                <a:cs typeface="Comic Sans MS" panose="030F0702030302020204" charset="0"/>
+              </a:rPr>
+              <a:t>Hardware Requirements</a:t>
+            </a:r>
+            <a:endParaRPr lang="en-US" altLang="en-GB" sz="2000">
+              <a:latin typeface="Comic Sans MS" panose="030F0702030302020204" charset="0"/>
+              <a:cs typeface="Comic Sans MS" panose="030F0702030302020204" charset="0"/>
+            </a:endParaRPr>
+          </a:p>
+          <a:p>
+            <a:pPr lvl="0" algn="l" rtl="0">
+              <a:lnSpc>
+                <a:spcPct val="150000"/>
+              </a:lnSpc>
+              <a:spcBef>
+                <a:spcPts val="360"/>
+              </a:spcBef>
+              <a:spcAft>
+                <a:spcPts val="0"/>
+              </a:spcAft>
+              <a:buSzPts val="1800"/>
+              <a:buFont typeface="Wingdings" panose="05000000000000000000" charset="0"/>
+              <a:buChar char="q"/>
+            </a:pPr>
+            <a:r>
+              <a:rPr lang="en-US" altLang="en-GB" sz="2000">
+                <a:latin typeface="Comic Sans MS" panose="030F0702030302020204" charset="0"/>
+                <a:cs typeface="Comic Sans MS" panose="030F0702030302020204" charset="0"/>
+              </a:rPr>
+              <a:t>Software Requirements</a:t>
+            </a:r>
+            <a:endParaRPr lang="en-US" altLang="en-GB" sz="2000">
+              <a:latin typeface="Comic Sans MS" panose="030F0702030302020204" charset="0"/>
+              <a:cs typeface="Comic Sans MS" panose="030F0702030302020204" charset="0"/>
+            </a:endParaRPr>
+          </a:p>
+        </p:txBody>
+      </p:sp>
+      <p:sp>
+        <p:nvSpPr>
+          <p:cNvPr id="2" name="Text Box 1"/>
+          <p:cNvSpPr txBox="1"/>
+          <p:nvPr/>
+        </p:nvSpPr>
+        <p:spPr>
+          <a:xfrm>
+            <a:off x="4572635" y="1104900"/>
+            <a:ext cx="4336415" cy="3347085"/>
+          </a:xfrm>
+          <a:prstGeom prst="rect">
+            <a:avLst/>
+          </a:prstGeom>
+          <a:noFill/>
+        </p:spPr>
+        <p:txBody>
+          <a:bodyPr wrap="square" rtlCol="0">
+            <a:noAutofit/>
+          </a:bodyPr>
+          <a:p>
+            <a:pPr marL="342900" lvl="0" indent="-342900" algn="l" rtl="0">
+              <a:lnSpc>
+                <a:spcPct val="150000"/>
+              </a:lnSpc>
+              <a:spcBef>
+                <a:spcPts val="360"/>
+              </a:spcBef>
+              <a:spcAft>
+                <a:spcPts val="0"/>
+              </a:spcAft>
+              <a:buClr>
+                <a:srgbClr val="FFFFFF"/>
+              </a:buClr>
+              <a:buSzPts val="1800"/>
+              <a:buFont typeface="Wingdings" panose="05000000000000000000" charset="0"/>
+              <a:buChar char="q"/>
+            </a:pPr>
+            <a:r>
+              <a:rPr lang="en-US" altLang="en-GB" sz="2000">
+                <a:solidFill>
+                  <a:schemeClr val="bg1"/>
+                </a:solidFill>
+                <a:latin typeface="Comic Sans MS" panose="030F0702030302020204" charset="0"/>
+                <a:cs typeface="Comic Sans MS" panose="030F0702030302020204" charset="0"/>
+                <a:sym typeface="+mn-ea"/>
+              </a:rPr>
+              <a:t>Proposed Architecture</a:t>
+            </a:r>
+            <a:endParaRPr lang="en-US" altLang="en-GB" sz="2000">
+              <a:solidFill>
+                <a:schemeClr val="bg1"/>
+              </a:solidFill>
+              <a:latin typeface="Comic Sans MS" panose="030F0702030302020204" charset="0"/>
+              <a:cs typeface="Comic Sans MS" panose="030F0702030302020204" charset="0"/>
+              <a:sym typeface="+mn-ea"/>
+            </a:endParaRPr>
+          </a:p>
+          <a:p>
+            <a:pPr marL="342900" lvl="0" indent="-342900" algn="l" rtl="0">
+              <a:lnSpc>
+                <a:spcPct val="150000"/>
+              </a:lnSpc>
+              <a:spcBef>
+                <a:spcPts val="360"/>
+              </a:spcBef>
+              <a:spcAft>
+                <a:spcPts val="0"/>
+              </a:spcAft>
+              <a:buClr>
+                <a:srgbClr val="FFFFFF"/>
+              </a:buClr>
+              <a:buSzPts val="1800"/>
+              <a:buFont typeface="Wingdings" panose="05000000000000000000" charset="0"/>
+              <a:buChar char="q"/>
+            </a:pPr>
+            <a:r>
+              <a:rPr lang="en-US" altLang="en-GB" sz="2000">
+                <a:solidFill>
+                  <a:schemeClr val="bg1"/>
+                </a:solidFill>
+                <a:latin typeface="Comic Sans MS" panose="030F0702030302020204" charset="0"/>
+                <a:cs typeface="Comic Sans MS" panose="030F0702030302020204" charset="0"/>
+                <a:sym typeface="+mn-ea"/>
+              </a:rPr>
+              <a:t>Methodology Adapted</a:t>
+            </a:r>
+            <a:endParaRPr lang="en-US" altLang="en-GB" sz="2000">
+              <a:solidFill>
+                <a:schemeClr val="bg1"/>
+              </a:solidFill>
+              <a:latin typeface="Comic Sans MS" panose="030F0702030302020204" charset="0"/>
+              <a:cs typeface="Comic Sans MS" panose="030F0702030302020204" charset="0"/>
+              <a:sym typeface="+mn-ea"/>
+            </a:endParaRPr>
+          </a:p>
+          <a:p>
+            <a:pPr marL="342900" lvl="0" indent="-342900" algn="l" rtl="0">
+              <a:lnSpc>
+                <a:spcPct val="150000"/>
+              </a:lnSpc>
+              <a:spcBef>
+                <a:spcPts val="360"/>
+              </a:spcBef>
+              <a:spcAft>
+                <a:spcPts val="0"/>
+              </a:spcAft>
+              <a:buClr>
+                <a:srgbClr val="FFFFFF"/>
+              </a:buClr>
+              <a:buSzPts val="1800"/>
+              <a:buFont typeface="Wingdings" panose="05000000000000000000" charset="0"/>
+              <a:buChar char="q"/>
+            </a:pPr>
+            <a:r>
+              <a:rPr lang="en-US" altLang="en-GB" sz="2000">
+                <a:solidFill>
+                  <a:schemeClr val="bg1"/>
+                </a:solidFill>
+                <a:latin typeface="Comic Sans MS" panose="030F0702030302020204" charset="0"/>
+                <a:cs typeface="Comic Sans MS" panose="030F0702030302020204" charset="0"/>
+                <a:sym typeface="+mn-ea"/>
+              </a:rPr>
+              <a:t>Output Screenshots	</a:t>
+            </a:r>
+            <a:endParaRPr lang="en-US" altLang="en-GB" sz="2000">
+              <a:solidFill>
+                <a:schemeClr val="bg1"/>
+              </a:solidFill>
+              <a:latin typeface="Comic Sans MS" panose="030F0702030302020204" charset="0"/>
+              <a:cs typeface="Comic Sans MS" panose="030F0702030302020204" charset="0"/>
+              <a:sym typeface="+mn-ea"/>
+            </a:endParaRPr>
+          </a:p>
+          <a:p>
+            <a:pPr marL="342900" lvl="0" indent="-342900" algn="l" rtl="0">
+              <a:lnSpc>
+                <a:spcPct val="150000"/>
+              </a:lnSpc>
+              <a:spcBef>
+                <a:spcPts val="360"/>
+              </a:spcBef>
+              <a:spcAft>
+                <a:spcPts val="0"/>
+              </a:spcAft>
+              <a:buClr>
+                <a:srgbClr val="FFFFFF"/>
+              </a:buClr>
+              <a:buSzPts val="1800"/>
+              <a:buFont typeface="Wingdings" panose="05000000000000000000" charset="0"/>
+              <a:buChar char="q"/>
+            </a:pPr>
+            <a:r>
+              <a:rPr lang="en-US" altLang="en-GB" sz="2000">
+                <a:solidFill>
+                  <a:schemeClr val="bg1"/>
+                </a:solidFill>
+                <a:latin typeface="Comic Sans MS" panose="030F0702030302020204" charset="0"/>
+                <a:cs typeface="Comic Sans MS" panose="030F0702030302020204" charset="0"/>
+                <a:sym typeface="+mn-ea"/>
+              </a:rPr>
+              <a:t>Results and Discussion</a:t>
+            </a:r>
+            <a:endParaRPr lang="en-US" altLang="en-GB" sz="2000">
+              <a:solidFill>
+                <a:schemeClr val="bg1"/>
+              </a:solidFill>
+              <a:latin typeface="Comic Sans MS" panose="030F0702030302020204" charset="0"/>
+              <a:cs typeface="Comic Sans MS" panose="030F0702030302020204" charset="0"/>
+              <a:sym typeface="+mn-ea"/>
+            </a:endParaRPr>
+          </a:p>
+          <a:p>
+            <a:pPr marL="342900" lvl="0" indent="-342900" algn="l" rtl="0">
+              <a:lnSpc>
+                <a:spcPct val="150000"/>
+              </a:lnSpc>
+              <a:spcBef>
+                <a:spcPts val="360"/>
+              </a:spcBef>
+              <a:spcAft>
+                <a:spcPts val="0"/>
+              </a:spcAft>
+              <a:buClr>
+                <a:srgbClr val="FFFFFF"/>
+              </a:buClr>
+              <a:buSzPts val="1800"/>
+              <a:buFont typeface="Wingdings" panose="05000000000000000000" charset="0"/>
+              <a:buChar char="q"/>
+            </a:pPr>
+            <a:r>
+              <a:rPr lang="en-US" altLang="en-GB" sz="2000">
+                <a:solidFill>
+                  <a:schemeClr val="bg1"/>
+                </a:solidFill>
+                <a:latin typeface="Comic Sans MS" panose="030F0702030302020204" charset="0"/>
+                <a:cs typeface="Comic Sans MS" panose="030F0702030302020204" charset="0"/>
+                <a:sym typeface="+mn-ea"/>
+              </a:rPr>
+              <a:t>Conclusion and Future Work</a:t>
+            </a:r>
+            <a:endParaRPr lang="en-US" altLang="en-GB" sz="2000">
+              <a:solidFill>
+                <a:schemeClr val="bg1"/>
+              </a:solidFill>
+              <a:latin typeface="Comic Sans MS" panose="030F0702030302020204" charset="0"/>
+              <a:cs typeface="Comic Sans MS" panose="030F0702030302020204" charset="0"/>
+              <a:sym typeface="+mn-ea"/>
+            </a:endParaRPr>
+          </a:p>
+          <a:p>
+            <a:pPr marL="342900" lvl="0" indent="-342900" algn="l" rtl="0">
+              <a:lnSpc>
+                <a:spcPct val="150000"/>
+              </a:lnSpc>
+              <a:spcBef>
+                <a:spcPts val="360"/>
+              </a:spcBef>
+              <a:spcAft>
+                <a:spcPts val="0"/>
+              </a:spcAft>
+              <a:buClr>
+                <a:srgbClr val="FFFFFF"/>
+              </a:buClr>
+              <a:buSzPts val="1800"/>
+              <a:buFont typeface="Wingdings" panose="05000000000000000000" charset="0"/>
+              <a:buChar char="q"/>
+            </a:pPr>
+            <a:r>
+              <a:rPr lang="en-US" altLang="en-GB" sz="2000">
+                <a:solidFill>
+                  <a:schemeClr val="bg1"/>
+                </a:solidFill>
+                <a:latin typeface="Comic Sans MS" panose="030F0702030302020204" charset="0"/>
+                <a:cs typeface="Comic Sans MS" panose="030F0702030302020204" charset="0"/>
+                <a:sym typeface="+mn-ea"/>
+              </a:rPr>
+              <a:t>Reference Links</a:t>
+            </a:r>
+            <a:endParaRPr lang="en-US" altLang="en-GB" sz="2000">
+              <a:solidFill>
+                <a:schemeClr val="bg1"/>
+              </a:solidFill>
+              <a:latin typeface="Comic Sans MS" panose="030F0702030302020204" charset="0"/>
+              <a:cs typeface="Comic Sans MS" panose="030F0702030302020204" charset="0"/>
+            </a:endParaRPr>
+          </a:p>
+          <a:p>
+            <a:pPr marL="0" indent="0">
+              <a:buClr>
+                <a:srgbClr val="FFFFFF"/>
+              </a:buClr>
+              <a:buFont typeface="Wingdings" panose="05000000000000000000" charset="0"/>
+              <a:buChar char="q"/>
+            </a:pPr>
+            <a:endParaRPr lang="en-US" altLang="en-GB" sz="2000">
+              <a:solidFill>
+                <a:schemeClr val="bg1"/>
+              </a:solidFill>
+              <a:latin typeface="Comic Sans MS" panose="030F0702030302020204" charset="0"/>
+              <a:cs typeface="Comic Sans MS" panose="030F0702030302020204" charset="0"/>
+            </a:endParaRPr>
+          </a:p>
+        </p:txBody>
+      </p:sp>
+    </p:spTree>
+  </p:cSld>
+  <p:clrMapOvr>
+    <a:masterClrMapping/>
+  </p:clrMapOvr>
+</p:sld>
+</file>
+
+<file path=ppt/slides/slide20.xml><?xml version="1.0" encoding="utf-8"?>
+<p:sld xmlns:a="http://schemas.openxmlformats.org/drawingml/2006/main" xmlns:r="http://schemas.openxmlformats.org/officeDocument/2006/relationships" xmlns:p="http://schemas.openxmlformats.org/presentationml/2006/main">
+  <p:cSld>
+    <p:bg>
+      <p:bgPr>
+        <a:blipFill rotWithShape="1">
+          <a:blip r:embed="rId1"/>
+          <a:stretch>
+            <a:fillRect/>
+          </a:stretch>
+        </a:blipFill>
+        <a:effectLst/>
+      </p:bgPr>
+    </p:bg>
+    <p:spTree>
+      <p:nvGrpSpPr>
+        <p:cNvPr id="53" name="Shape 53"/>
+        <p:cNvGrpSpPr/>
+        <p:nvPr/>
+      </p:nvGrpSpPr>
+      <p:grpSpPr>
+        <a:xfrm>
+          <a:off x="0" y="0"/>
+          <a:ext cx="0" cy="0"/>
+          <a:chOff x="0" y="0"/>
+          <a:chExt cx="0" cy="0"/>
+        </a:xfrm>
+      </p:grpSpPr>
+      <p:sp>
+        <p:nvSpPr>
+          <p:cNvPr id="54" name="Google Shape;54;p14"/>
+          <p:cNvSpPr txBox="1"/>
+          <p:nvPr>
+            <p:ph type="title"/>
+          </p:nvPr>
+        </p:nvSpPr>
+        <p:spPr>
+          <a:xfrm>
+            <a:off x="246380" y="97790"/>
+            <a:ext cx="8804275" cy="673735"/>
+          </a:xfrm>
+          <a:prstGeom prst="rect">
+            <a:avLst/>
+          </a:prstGeom>
+        </p:spPr>
+        <p:txBody>
+          <a:bodyPr spcFirstLastPara="1" wrap="square" lIns="91425" tIns="45700" rIns="91425" bIns="45700" anchor="ctr" anchorCtr="0">
+            <a:noAutofit/>
+          </a:bodyPr>
+          <a:lstStyle/>
+          <a:p>
+            <a:pPr marL="0" lvl="0" indent="0" algn="ctr" rtl="0">
+              <a:spcBef>
+                <a:spcPts val="0"/>
+              </a:spcBef>
+              <a:spcAft>
+                <a:spcPts val="0"/>
+              </a:spcAft>
+              <a:buNone/>
+            </a:pPr>
+            <a:r>
+              <a:rPr lang="en-US" altLang="en-GB" sz="3400" u="sng">
+                <a:latin typeface="Algerian" panose="04020705040A02060702"/>
+                <a:ea typeface="Algerian" panose="04020705040A02060702"/>
+                <a:cs typeface="Algerian" panose="04020705040A02060702"/>
+                <a:sym typeface="Algerian" panose="04020705040A02060702"/>
+              </a:rPr>
+              <a:t>CONCLUSION AND FUTURE WORK</a:t>
+            </a:r>
+            <a:endParaRPr lang="en-US" altLang="en-GB" sz="3400" u="sng">
+              <a:latin typeface="Algerian" panose="04020705040A02060702"/>
+              <a:ea typeface="Algerian" panose="04020705040A02060702"/>
+              <a:cs typeface="Algerian" panose="04020705040A02060702"/>
+              <a:sym typeface="Algerian" panose="04020705040A02060702"/>
+            </a:endParaRPr>
+          </a:p>
+        </p:txBody>
+      </p:sp>
+      <p:sp>
+        <p:nvSpPr>
+          <p:cNvPr id="55" name="Google Shape;55;p14"/>
+          <p:cNvSpPr txBox="1"/>
+          <p:nvPr>
+            <p:ph type="body" idx="1"/>
+          </p:nvPr>
+        </p:nvSpPr>
+        <p:spPr>
+          <a:xfrm>
+            <a:off x="107315" y="1055370"/>
+            <a:ext cx="8943975" cy="4022090"/>
+          </a:xfrm>
+          <a:prstGeom prst="rect">
+            <a:avLst/>
+          </a:prstGeom>
+        </p:spPr>
+        <p:txBody>
+          <a:bodyPr spcFirstLastPara="1" wrap="square" lIns="91425" tIns="45700" rIns="91425" bIns="45700" anchor="t" anchorCtr="0">
+            <a:noAutofit/>
+          </a:bodyPr>
+          <a:lstStyle/>
+          <a:p>
+            <a:pPr marL="114300" lvl="0" indent="0" algn="l" rtl="0">
+              <a:lnSpc>
+                <a:spcPct val="150000"/>
+              </a:lnSpc>
+              <a:spcBef>
+                <a:spcPts val="360"/>
+              </a:spcBef>
+              <a:spcAft>
+                <a:spcPts val="0"/>
+              </a:spcAft>
+              <a:buSzPts val="1800"/>
+              <a:buFont typeface="Wingdings" panose="05000000000000000000" charset="0"/>
+              <a:buNone/>
+            </a:pPr>
+            <a:r>
+              <a:rPr lang="en-US" altLang="en-US" sz="1800">
+                <a:latin typeface="Comic Sans MS" panose="030F0702030302020204" charset="0"/>
+                <a:cs typeface="Comic Sans MS" panose="030F0702030302020204" charset="0"/>
+              </a:rPr>
+              <a:t>The Hospital Management System implemented with the MERN stack effectively solves major issues such as appointment scheduling, patient record management, prescription management, and medicine inventory management. Automating repetitive tasks and providing role-based access, the system improves the efficiency, accuracy, and accessibility of healthcare facilities. It offers an easy-to-use interface for admins, doctors, and patients, making the experience smooth across all modules. The system helps in improved organization of data, less administrative burden, and enhanced patient care through prompt access to medical information.</a:t>
+            </a:r>
+            <a:endParaRPr lang="en-US" altLang="en-US" sz="1800">
+              <a:latin typeface="Comic Sans MS" panose="030F0702030302020204" charset="0"/>
+              <a:cs typeface="Comic Sans MS" panose="030F0702030302020204" charset="0"/>
+            </a:endParaRPr>
+          </a:p>
+        </p:txBody>
+      </p:sp>
+    </p:spTree>
+  </p:cSld>
+  <p:clrMapOvr>
+    <a:masterClrMapping/>
+  </p:clrMapOvr>
+</p:sld>
+</file>
+
+<file path=ppt/slides/slide21.xml><?xml version="1.0" encoding="utf-8"?>
+<p:sld xmlns:a="http://schemas.openxmlformats.org/drawingml/2006/main" xmlns:r="http://schemas.openxmlformats.org/officeDocument/2006/relationships" xmlns:p="http://schemas.openxmlformats.org/presentationml/2006/main">
+  <p:cSld>
+    <p:bg>
+      <p:bgPr>
+        <a:blipFill rotWithShape="1">
+          <a:blip r:embed="rId1"/>
+          <a:stretch>
+            <a:fillRect/>
+          </a:stretch>
+        </a:blipFill>
+        <a:effectLst/>
+      </p:bgPr>
+    </p:bg>
+    <p:spTree>
+      <p:nvGrpSpPr>
+        <p:cNvPr id="53" name="Shape 53"/>
+        <p:cNvGrpSpPr/>
+        <p:nvPr/>
+      </p:nvGrpSpPr>
+      <p:grpSpPr>
+        <a:xfrm>
+          <a:off x="0" y="0"/>
+          <a:ext cx="0" cy="0"/>
+          <a:chOff x="0" y="0"/>
+          <a:chExt cx="0" cy="0"/>
+        </a:xfrm>
+      </p:grpSpPr>
+      <p:sp>
+        <p:nvSpPr>
+          <p:cNvPr id="54" name="Google Shape;54;p14"/>
+          <p:cNvSpPr txBox="1"/>
+          <p:nvPr>
+            <p:ph type="title"/>
+          </p:nvPr>
+        </p:nvSpPr>
+        <p:spPr>
+          <a:xfrm>
+            <a:off x="246380" y="97790"/>
+            <a:ext cx="8804275" cy="673735"/>
+          </a:xfrm>
+          <a:prstGeom prst="rect">
+            <a:avLst/>
+          </a:prstGeom>
+        </p:spPr>
+        <p:txBody>
+          <a:bodyPr spcFirstLastPara="1" wrap="square" lIns="91425" tIns="45700" rIns="91425" bIns="45700" anchor="ctr" anchorCtr="0">
+            <a:noAutofit/>
+          </a:bodyPr>
+          <a:lstStyle/>
+          <a:p>
+            <a:pPr marL="0" lvl="0" indent="0" algn="ctr" rtl="0">
+              <a:spcBef>
+                <a:spcPts val="0"/>
+              </a:spcBef>
+              <a:spcAft>
+                <a:spcPts val="0"/>
+              </a:spcAft>
+              <a:buNone/>
+            </a:pPr>
+            <a:r>
+              <a:rPr lang="en-US" altLang="en-GB" sz="3400" u="sng">
+                <a:latin typeface="Algerian" panose="04020705040A02060702"/>
+                <a:ea typeface="Algerian" panose="04020705040A02060702"/>
+                <a:cs typeface="Algerian" panose="04020705040A02060702"/>
+                <a:sym typeface="Algerian" panose="04020705040A02060702"/>
+              </a:rPr>
+              <a:t>CONCLUSION AND FUTURE WORK...</a:t>
+            </a:r>
+            <a:endParaRPr lang="en-US" altLang="en-GB" sz="3400" u="sng">
+              <a:latin typeface="Algerian" panose="04020705040A02060702"/>
+              <a:ea typeface="Algerian" panose="04020705040A02060702"/>
+              <a:cs typeface="Algerian" panose="04020705040A02060702"/>
+              <a:sym typeface="Algerian" panose="04020705040A02060702"/>
+            </a:endParaRPr>
+          </a:p>
+        </p:txBody>
+      </p:sp>
+      <p:sp>
+        <p:nvSpPr>
+          <p:cNvPr id="55" name="Google Shape;55;p14"/>
+          <p:cNvSpPr txBox="1"/>
+          <p:nvPr>
+            <p:ph type="body" idx="1"/>
+          </p:nvPr>
+        </p:nvSpPr>
+        <p:spPr>
+          <a:xfrm>
+            <a:off x="107315" y="1055370"/>
+            <a:ext cx="8943975" cy="4022090"/>
+          </a:xfrm>
+          <a:prstGeom prst="rect">
+            <a:avLst/>
+          </a:prstGeom>
+        </p:spPr>
+        <p:txBody>
+          <a:bodyPr spcFirstLastPara="1" wrap="square" lIns="91425" tIns="45700" rIns="91425" bIns="45700" anchor="t" anchorCtr="0">
+            <a:noAutofit/>
+          </a:bodyPr>
+          <a:lstStyle/>
+          <a:p>
+            <a:pPr marL="114300" lvl="0" indent="0" algn="l" rtl="0">
+              <a:lnSpc>
+                <a:spcPct val="150000"/>
+              </a:lnSpc>
+              <a:spcBef>
+                <a:spcPts val="360"/>
+              </a:spcBef>
+              <a:spcAft>
+                <a:spcPts val="0"/>
+              </a:spcAft>
+              <a:buSzPts val="1800"/>
+              <a:buFont typeface="Wingdings" panose="05000000000000000000" charset="0"/>
+              <a:buNone/>
+            </a:pPr>
+            <a:r>
+              <a:rPr lang="en-US" altLang="en-US" sz="1800" u="sng">
+                <a:latin typeface="Algerian" panose="04020705040A02060702" charset="0"/>
+                <a:cs typeface="Algerian" panose="04020705040A02060702" charset="0"/>
+              </a:rPr>
+              <a:t>Future Work</a:t>
+            </a:r>
+            <a:endParaRPr lang="en-US" altLang="en-US" sz="1800" u="sng">
+              <a:latin typeface="Algerian" panose="04020705040A02060702" charset="0"/>
+              <a:cs typeface="Algerian" panose="04020705040A02060702" charset="0"/>
+            </a:endParaRPr>
+          </a:p>
+          <a:p>
+            <a:pPr marL="114300" lvl="0" indent="0" algn="l" rtl="0">
+              <a:lnSpc>
+                <a:spcPct val="150000"/>
+              </a:lnSpc>
+              <a:spcBef>
+                <a:spcPts val="360"/>
+              </a:spcBef>
+              <a:spcAft>
+                <a:spcPts val="0"/>
+              </a:spcAft>
+              <a:buSzPts val="1800"/>
+              <a:buFont typeface="Wingdings" panose="05000000000000000000" charset="0"/>
+              <a:buNone/>
+            </a:pPr>
+            <a:r>
+              <a:rPr lang="en-US" altLang="en-US" sz="1800">
+                <a:latin typeface="Comic Sans MS" panose="030F0702030302020204" charset="0"/>
+                <a:cs typeface="Comic Sans MS" panose="030F0702030302020204" charset="0"/>
+              </a:rPr>
+              <a:t>Developing an online payment module for appointment scheduling and inventory. Creating laboratory page in the future and to install a module for the patient to schedule for lab tests and produce reports and consult doctor. Developing an app for android and iOS to make the application more accessible so that individuals can use it conveniently in a vast array of various people. And lastly, to include regional languages such that users who cannot read English also be able to use the application.</a:t>
+            </a:r>
+            <a:endParaRPr lang="en-US" altLang="en-US" sz="1800">
+              <a:latin typeface="Comic Sans MS" panose="030F0702030302020204" charset="0"/>
+              <a:cs typeface="Comic Sans MS" panose="030F0702030302020204" charset="0"/>
+            </a:endParaRPr>
+          </a:p>
+          <a:p>
+            <a:pPr marL="114300" lvl="0" indent="0" algn="l" rtl="0">
+              <a:lnSpc>
+                <a:spcPct val="150000"/>
+              </a:lnSpc>
+              <a:spcBef>
+                <a:spcPts val="360"/>
+              </a:spcBef>
+              <a:spcAft>
+                <a:spcPts val="0"/>
+              </a:spcAft>
+              <a:buSzPts val="1800"/>
+              <a:buFont typeface="Wingdings" panose="05000000000000000000" charset="0"/>
+              <a:buNone/>
+            </a:pPr>
+            <a:endParaRPr lang="en-US" altLang="en-US" sz="1800">
+              <a:latin typeface="Comic Sans MS" panose="030F0702030302020204" charset="0"/>
+              <a:cs typeface="Comic Sans MS" panose="030F0702030302020204" charset="0"/>
+            </a:endParaRPr>
+          </a:p>
+        </p:txBody>
+      </p:sp>
+    </p:spTree>
+  </p:cSld>
+  <p:clrMapOvr>
+    <a:masterClrMapping/>
+  </p:clrMapOvr>
+</p:sld>
+</file>
+
+<file path=ppt/slides/slide22.xml><?xml version="1.0" encoding="utf-8"?>
+<p:sld xmlns:a="http://schemas.openxmlformats.org/drawingml/2006/main" xmlns:r="http://schemas.openxmlformats.org/officeDocument/2006/relationships" xmlns:p="http://schemas.openxmlformats.org/presentationml/2006/main">
+  <p:cSld>
+    <p:bg>
+      <p:bgPr>
+        <a:blipFill rotWithShape="1">
+          <a:blip r:embed="rId1"/>
+          <a:stretch>
+            <a:fillRect/>
+          </a:stretch>
+        </a:blipFill>
+        <a:effectLst/>
+      </p:bgPr>
+    </p:bg>
+    <p:spTree>
+      <p:nvGrpSpPr>
+        <p:cNvPr id="53" name="Shape 53"/>
+        <p:cNvGrpSpPr/>
+        <p:nvPr/>
+      </p:nvGrpSpPr>
+      <p:grpSpPr>
+        <a:xfrm>
+          <a:off x="0" y="0"/>
+          <a:ext cx="0" cy="0"/>
+          <a:chOff x="0" y="0"/>
+          <a:chExt cx="0" cy="0"/>
+        </a:xfrm>
+      </p:grpSpPr>
+      <p:sp>
+        <p:nvSpPr>
+          <p:cNvPr id="54" name="Google Shape;54;p14"/>
+          <p:cNvSpPr txBox="1"/>
+          <p:nvPr>
+            <p:ph type="title"/>
+          </p:nvPr>
+        </p:nvSpPr>
+        <p:spPr>
+          <a:xfrm>
+            <a:off x="484505" y="212090"/>
+            <a:ext cx="8428990" cy="637540"/>
+          </a:xfrm>
+          <a:prstGeom prst="rect">
+            <a:avLst/>
+          </a:prstGeom>
+        </p:spPr>
+        <p:txBody>
+          <a:bodyPr spcFirstLastPara="1" wrap="square" lIns="91425" tIns="45700" rIns="91425" bIns="45700" anchor="ctr" anchorCtr="0">
+            <a:noAutofit/>
+          </a:bodyPr>
+          <a:lstStyle/>
+          <a:p>
+            <a:pPr marL="0" lvl="0" indent="0" algn="ctr" rtl="0">
               <a:spcBef>
                 <a:spcPts val="0"/>
               </a:spcBef>
@@ -10236,7 +11810,7 @@
 </p:sld>
 </file>
 
-<file path=ppt/slides/slide19.xml><?xml version="1.0" encoding="utf-8"?>
+<file path=ppt/slides/slide23.xml><?xml version="1.0" encoding="utf-8"?>
 <p:sld xmlns:a="http://schemas.openxmlformats.org/drawingml/2006/main" xmlns:r="http://schemas.openxmlformats.org/officeDocument/2006/relationships" xmlns:p="http://schemas.openxmlformats.org/presentationml/2006/main">
   <p:cSld>
     <p:bg>
@@ -10331,530 +11905,6 @@
 </p:sld>
 </file>
 
-<file path=ppt/slides/slide2.xml><?xml version="1.0" encoding="utf-8"?>
-<p:sld xmlns:a="http://schemas.openxmlformats.org/drawingml/2006/main" xmlns:r="http://schemas.openxmlformats.org/officeDocument/2006/relationships" xmlns:p="http://schemas.openxmlformats.org/presentationml/2006/main">
-  <p:cSld>
-    <p:bg>
-      <p:bgPr>
-        <a:blipFill rotWithShape="1">
-          <a:blip r:embed="rId1"/>
-          <a:stretch>
-            <a:fillRect/>
-          </a:stretch>
-        </a:blipFill>
-        <a:effectLst/>
-      </p:bgPr>
-    </p:bg>
-    <p:spTree>
-      <p:nvGrpSpPr>
-        <p:cNvPr id="53" name="Shape 53"/>
-        <p:cNvGrpSpPr/>
-        <p:nvPr/>
-      </p:nvGrpSpPr>
-      <p:grpSpPr>
-        <a:xfrm>
-          <a:off x="0" y="0"/>
-          <a:ext cx="0" cy="0"/>
-          <a:chOff x="0" y="0"/>
-          <a:chExt cx="0" cy="0"/>
-        </a:xfrm>
-      </p:grpSpPr>
-      <p:sp>
-        <p:nvSpPr>
-          <p:cNvPr id="54" name="Google Shape;54;p14"/>
-          <p:cNvSpPr txBox="1"/>
-          <p:nvPr>
-            <p:ph type="title"/>
-          </p:nvPr>
-        </p:nvSpPr>
-        <p:spPr>
-          <a:xfrm>
-            <a:off x="793150" y="212383"/>
-            <a:ext cx="6408600" cy="637500"/>
-          </a:xfrm>
-          <a:prstGeom prst="rect">
-            <a:avLst/>
-          </a:prstGeom>
-        </p:spPr>
-        <p:txBody>
-          <a:bodyPr spcFirstLastPara="1" wrap="square" lIns="91425" tIns="45700" rIns="91425" bIns="45700" anchor="ctr" anchorCtr="0">
-            <a:noAutofit/>
-          </a:bodyPr>
-          <a:lstStyle/>
-          <a:p>
-            <a:pPr marL="0" lvl="0" indent="0" algn="l" rtl="0">
-              <a:spcBef>
-                <a:spcPts val="0"/>
-              </a:spcBef>
-              <a:spcAft>
-                <a:spcPts val="0"/>
-              </a:spcAft>
-              <a:buNone/>
-            </a:pPr>
-            <a:r>
-              <a:rPr lang="en-GB" sz="3400" u="sng">
-                <a:latin typeface="Algerian" panose="04020705040A02060702"/>
-                <a:ea typeface="Algerian" panose="04020705040A02060702"/>
-                <a:cs typeface="Algerian" panose="04020705040A02060702"/>
-                <a:sym typeface="Algerian" panose="04020705040A02060702"/>
-              </a:rPr>
-              <a:t>Overview </a:t>
-            </a:r>
-            <a:endParaRPr sz="3400" u="sng">
-              <a:latin typeface="Algerian" panose="04020705040A02060702"/>
-              <a:ea typeface="Algerian" panose="04020705040A02060702"/>
-              <a:cs typeface="Algerian" panose="04020705040A02060702"/>
-              <a:sym typeface="Algerian" panose="04020705040A02060702"/>
-            </a:endParaRPr>
-          </a:p>
-        </p:txBody>
-      </p:sp>
-      <p:sp>
-        <p:nvSpPr>
-          <p:cNvPr id="55" name="Google Shape;55;p14"/>
-          <p:cNvSpPr txBox="1"/>
-          <p:nvPr>
-            <p:ph type="body" idx="1"/>
-          </p:nvPr>
-        </p:nvSpPr>
-        <p:spPr>
-          <a:xfrm>
-            <a:off x="484505" y="1127125"/>
-            <a:ext cx="3442970" cy="3459480"/>
-          </a:xfrm>
-          <a:prstGeom prst="rect">
-            <a:avLst/>
-          </a:prstGeom>
-        </p:spPr>
-        <p:txBody>
-          <a:bodyPr spcFirstLastPara="1" wrap="square" lIns="91425" tIns="45700" rIns="91425" bIns="45700" anchor="t" anchorCtr="0">
-            <a:noAutofit/>
-          </a:bodyPr>
-          <a:lstStyle/>
-          <a:p>
-            <a:pPr lvl="0" algn="l" rtl="0">
-              <a:lnSpc>
-                <a:spcPct val="150000"/>
-              </a:lnSpc>
-              <a:spcBef>
-                <a:spcPts val="360"/>
-              </a:spcBef>
-              <a:spcAft>
-                <a:spcPts val="0"/>
-              </a:spcAft>
-              <a:buSzPts val="1800"/>
-              <a:buFont typeface="Wingdings" panose="05000000000000000000" charset="0"/>
-              <a:buChar char="q"/>
-            </a:pPr>
-            <a:endParaRPr lang="en-GB" sz="2000">
-              <a:latin typeface="Comic Sans MS" panose="030F0702030302020204" charset="0"/>
-              <a:cs typeface="Comic Sans MS" panose="030F0702030302020204" charset="0"/>
-            </a:endParaRPr>
-          </a:p>
-          <a:p>
-            <a:pPr lvl="0" algn="l" rtl="0">
-              <a:lnSpc>
-                <a:spcPct val="150000"/>
-              </a:lnSpc>
-              <a:spcBef>
-                <a:spcPts val="360"/>
-              </a:spcBef>
-              <a:spcAft>
-                <a:spcPts val="0"/>
-              </a:spcAft>
-              <a:buSzPts val="1800"/>
-              <a:buFont typeface="Wingdings" panose="05000000000000000000" charset="0"/>
-              <a:buChar char="q"/>
-            </a:pPr>
-            <a:r>
-              <a:rPr lang="en-GB" sz="2000">
-                <a:latin typeface="Comic Sans MS" panose="030F0702030302020204" charset="0"/>
-                <a:cs typeface="Comic Sans MS" panose="030F0702030302020204" charset="0"/>
-              </a:rPr>
-              <a:t>Introduction</a:t>
-            </a:r>
-            <a:endParaRPr lang="en-GB" sz="2000">
-              <a:latin typeface="Comic Sans MS" panose="030F0702030302020204" charset="0"/>
-              <a:cs typeface="Comic Sans MS" panose="030F0702030302020204" charset="0"/>
-            </a:endParaRPr>
-          </a:p>
-          <a:p>
-            <a:pPr lvl="0" algn="l" rtl="0">
-              <a:lnSpc>
-                <a:spcPct val="150000"/>
-              </a:lnSpc>
-              <a:spcBef>
-                <a:spcPts val="360"/>
-              </a:spcBef>
-              <a:spcAft>
-                <a:spcPts val="0"/>
-              </a:spcAft>
-              <a:buSzPts val="1800"/>
-              <a:buFont typeface="Wingdings" panose="05000000000000000000" charset="0"/>
-              <a:buChar char="q"/>
-            </a:pPr>
-            <a:r>
-              <a:rPr lang="en-US" altLang="en-GB" sz="2000">
-                <a:latin typeface="Comic Sans MS" panose="030F0702030302020204" charset="0"/>
-                <a:cs typeface="Comic Sans MS" panose="030F0702030302020204" charset="0"/>
-              </a:rPr>
-              <a:t>Gaps identified</a:t>
-            </a:r>
-            <a:endParaRPr lang="en-US" altLang="en-GB" sz="2000">
-              <a:latin typeface="Comic Sans MS" panose="030F0702030302020204" charset="0"/>
-              <a:cs typeface="Comic Sans MS" panose="030F0702030302020204" charset="0"/>
-            </a:endParaRPr>
-          </a:p>
-          <a:p>
-            <a:pPr lvl="0" algn="l" rtl="0">
-              <a:lnSpc>
-                <a:spcPct val="150000"/>
-              </a:lnSpc>
-              <a:spcBef>
-                <a:spcPts val="360"/>
-              </a:spcBef>
-              <a:spcAft>
-                <a:spcPts val="0"/>
-              </a:spcAft>
-              <a:buSzPts val="1800"/>
-              <a:buFont typeface="Wingdings" panose="05000000000000000000" charset="0"/>
-              <a:buChar char="q"/>
-            </a:pPr>
-            <a:r>
-              <a:rPr lang="en-US" altLang="en-GB" sz="2000">
-                <a:latin typeface="Comic Sans MS" panose="030F0702030302020204" charset="0"/>
-                <a:cs typeface="Comic Sans MS" panose="030F0702030302020204" charset="0"/>
-              </a:rPr>
-              <a:t>Objectives</a:t>
-            </a:r>
-            <a:r>
-              <a:rPr lang="en-GB" sz="2000">
-                <a:latin typeface="Comic Sans MS" panose="030F0702030302020204" charset="0"/>
-                <a:cs typeface="Comic Sans MS" panose="030F0702030302020204" charset="0"/>
-              </a:rPr>
-              <a:t> </a:t>
-            </a:r>
-            <a:endParaRPr lang="en-GB" sz="2000">
-              <a:latin typeface="Comic Sans MS" panose="030F0702030302020204" charset="0"/>
-              <a:cs typeface="Comic Sans MS" panose="030F0702030302020204" charset="0"/>
-            </a:endParaRPr>
-          </a:p>
-          <a:p>
-            <a:pPr lvl="0" algn="l" rtl="0">
-              <a:lnSpc>
-                <a:spcPct val="150000"/>
-              </a:lnSpc>
-              <a:spcBef>
-                <a:spcPts val="360"/>
-              </a:spcBef>
-              <a:spcAft>
-                <a:spcPts val="0"/>
-              </a:spcAft>
-              <a:buSzPts val="1800"/>
-              <a:buFont typeface="Wingdings" panose="05000000000000000000" charset="0"/>
-              <a:buChar char="q"/>
-            </a:pPr>
-            <a:r>
-              <a:rPr lang="en-US" altLang="en-GB" sz="2000">
-                <a:latin typeface="Comic Sans MS" panose="030F0702030302020204" charset="0"/>
-                <a:cs typeface="Comic Sans MS" panose="030F0702030302020204" charset="0"/>
-              </a:rPr>
-              <a:t>Problem Statement</a:t>
-            </a:r>
-            <a:endParaRPr lang="en-US" altLang="en-GB" sz="2000">
-              <a:latin typeface="Comic Sans MS" panose="030F0702030302020204" charset="0"/>
-              <a:cs typeface="Comic Sans MS" panose="030F0702030302020204" charset="0"/>
-            </a:endParaRPr>
-          </a:p>
-          <a:p>
-            <a:pPr lvl="0" algn="l" rtl="0">
-              <a:lnSpc>
-                <a:spcPct val="150000"/>
-              </a:lnSpc>
-              <a:spcBef>
-                <a:spcPts val="360"/>
-              </a:spcBef>
-              <a:spcAft>
-                <a:spcPts val="0"/>
-              </a:spcAft>
-              <a:buSzPts val="1800"/>
-              <a:buFont typeface="Wingdings" panose="05000000000000000000" charset="0"/>
-              <a:buChar char="q"/>
-            </a:pPr>
-            <a:r>
-              <a:rPr lang="en-US" altLang="en-GB" sz="2000">
-                <a:latin typeface="Comic Sans MS" panose="030F0702030302020204" charset="0"/>
-                <a:cs typeface="Comic Sans MS" panose="030F0702030302020204" charset="0"/>
-              </a:rPr>
-              <a:t>Project Plan</a:t>
-            </a:r>
-            <a:endParaRPr lang="en-US" altLang="en-GB" sz="2000">
-              <a:latin typeface="Comic Sans MS" panose="030F0702030302020204" charset="0"/>
-              <a:cs typeface="Comic Sans MS" panose="030F0702030302020204" charset="0"/>
-            </a:endParaRPr>
-          </a:p>
-        </p:txBody>
-      </p:sp>
-      <p:sp>
-        <p:nvSpPr>
-          <p:cNvPr id="2" name="Text Box 1"/>
-          <p:cNvSpPr txBox="1"/>
-          <p:nvPr/>
-        </p:nvSpPr>
-        <p:spPr>
-          <a:xfrm>
-            <a:off x="4385945" y="1104900"/>
-            <a:ext cx="3895725" cy="3147060"/>
-          </a:xfrm>
-          <a:prstGeom prst="rect">
-            <a:avLst/>
-          </a:prstGeom>
-          <a:noFill/>
-        </p:spPr>
-        <p:txBody>
-          <a:bodyPr wrap="square" rtlCol="0">
-            <a:noAutofit/>
-          </a:bodyPr>
-          <a:p>
-            <a:pPr marL="285750" lvl="0" indent="-285750" algn="l" rtl="0">
-              <a:lnSpc>
-                <a:spcPct val="150000"/>
-              </a:lnSpc>
-              <a:spcBef>
-                <a:spcPts val="360"/>
-              </a:spcBef>
-              <a:spcAft>
-                <a:spcPts val="0"/>
-              </a:spcAft>
-              <a:buClr>
-                <a:srgbClr val="FFFFFF"/>
-              </a:buClr>
-              <a:buSzPts val="1800"/>
-              <a:buFont typeface="Wingdings" panose="05000000000000000000" charset="0"/>
-              <a:buChar char="q"/>
-            </a:pPr>
-            <a:endParaRPr lang="en-US" altLang="en-GB" sz="2000">
-              <a:solidFill>
-                <a:schemeClr val="bg1"/>
-              </a:solidFill>
-              <a:latin typeface="Comic Sans MS" panose="030F0702030302020204" charset="0"/>
-              <a:cs typeface="Comic Sans MS" panose="030F0702030302020204" charset="0"/>
-              <a:sym typeface="+mn-ea"/>
-            </a:endParaRPr>
-          </a:p>
-          <a:p>
-            <a:pPr marL="285750" lvl="0" indent="-285750" algn="l" rtl="0">
-              <a:lnSpc>
-                <a:spcPct val="150000"/>
-              </a:lnSpc>
-              <a:spcBef>
-                <a:spcPts val="360"/>
-              </a:spcBef>
-              <a:spcAft>
-                <a:spcPts val="0"/>
-              </a:spcAft>
-              <a:buClr>
-                <a:srgbClr val="FFFFFF"/>
-              </a:buClr>
-              <a:buSzPts val="1800"/>
-              <a:buFont typeface="Wingdings" panose="05000000000000000000" charset="0"/>
-              <a:buChar char="q"/>
-            </a:pPr>
-            <a:r>
-              <a:rPr lang="en-US" altLang="en-GB" sz="2000">
-                <a:solidFill>
-                  <a:schemeClr val="bg1"/>
-                </a:solidFill>
-                <a:latin typeface="Comic Sans MS" panose="030F0702030302020204" charset="0"/>
-                <a:cs typeface="Comic Sans MS" panose="030F0702030302020204" charset="0"/>
-                <a:sym typeface="+mn-ea"/>
-              </a:rPr>
-              <a:t>Proposed Architecture</a:t>
-            </a:r>
-            <a:endParaRPr lang="en-US" altLang="en-GB" sz="2000">
-              <a:solidFill>
-                <a:schemeClr val="bg1"/>
-              </a:solidFill>
-              <a:latin typeface="Comic Sans MS" panose="030F0702030302020204" charset="0"/>
-              <a:cs typeface="Comic Sans MS" panose="030F0702030302020204" charset="0"/>
-              <a:sym typeface="+mn-ea"/>
-            </a:endParaRPr>
-          </a:p>
-          <a:p>
-            <a:pPr marL="285750" lvl="0" indent="-285750" algn="l" rtl="0">
-              <a:lnSpc>
-                <a:spcPct val="150000"/>
-              </a:lnSpc>
-              <a:spcBef>
-                <a:spcPts val="360"/>
-              </a:spcBef>
-              <a:spcAft>
-                <a:spcPts val="0"/>
-              </a:spcAft>
-              <a:buClr>
-                <a:srgbClr val="FFFFFF"/>
-              </a:buClr>
-              <a:buSzPts val="1800"/>
-              <a:buFont typeface="Wingdings" panose="05000000000000000000" charset="0"/>
-              <a:buChar char="q"/>
-            </a:pPr>
-            <a:r>
-              <a:rPr lang="en-US" altLang="en-GB" sz="2000">
-                <a:solidFill>
-                  <a:schemeClr val="bg1"/>
-                </a:solidFill>
-                <a:latin typeface="Comic Sans MS" panose="030F0702030302020204" charset="0"/>
-                <a:cs typeface="Comic Sans MS" panose="030F0702030302020204" charset="0"/>
-                <a:sym typeface="+mn-ea"/>
-              </a:rPr>
-              <a:t>Technologies to be used</a:t>
-            </a:r>
-            <a:endParaRPr lang="en-US" altLang="en-GB" sz="2000">
-              <a:solidFill>
-                <a:schemeClr val="bg1"/>
-              </a:solidFill>
-              <a:latin typeface="Comic Sans MS" panose="030F0702030302020204" charset="0"/>
-              <a:cs typeface="Comic Sans MS" panose="030F0702030302020204" charset="0"/>
-              <a:sym typeface="+mn-ea"/>
-            </a:endParaRPr>
-          </a:p>
-          <a:p>
-            <a:pPr marL="285750" lvl="0" indent="-285750" algn="l" rtl="0">
-              <a:lnSpc>
-                <a:spcPct val="150000"/>
-              </a:lnSpc>
-              <a:spcBef>
-                <a:spcPts val="360"/>
-              </a:spcBef>
-              <a:spcAft>
-                <a:spcPts val="0"/>
-              </a:spcAft>
-              <a:buClr>
-                <a:srgbClr val="FFFFFF"/>
-              </a:buClr>
-              <a:buSzPts val="1800"/>
-              <a:buFont typeface="Wingdings" panose="05000000000000000000" charset="0"/>
-              <a:buChar char="q"/>
-            </a:pPr>
-            <a:r>
-              <a:rPr lang="en-US" altLang="en-GB" sz="2000">
-                <a:solidFill>
-                  <a:schemeClr val="bg1"/>
-                </a:solidFill>
-                <a:latin typeface="Comic Sans MS" panose="030F0702030302020204" charset="0"/>
-                <a:cs typeface="Comic Sans MS" panose="030F0702030302020204" charset="0"/>
-                <a:sym typeface="+mn-ea"/>
-              </a:rPr>
-              <a:t>Methodology Adapted	</a:t>
-            </a:r>
-            <a:endParaRPr lang="en-GB" sz="2000">
-              <a:solidFill>
-                <a:schemeClr val="bg1"/>
-              </a:solidFill>
-              <a:latin typeface="Comic Sans MS" panose="030F0702030302020204" charset="0"/>
-              <a:cs typeface="Comic Sans MS" panose="030F0702030302020204" charset="0"/>
-            </a:endParaRPr>
-          </a:p>
-          <a:p>
-            <a:pPr lvl="0" algn="l" rtl="0">
-              <a:lnSpc>
-                <a:spcPct val="150000"/>
-              </a:lnSpc>
-              <a:spcBef>
-                <a:spcPts val="360"/>
-              </a:spcBef>
-              <a:spcAft>
-                <a:spcPts val="0"/>
-              </a:spcAft>
-              <a:buClr>
-                <a:srgbClr val="FFFFFF"/>
-              </a:buClr>
-              <a:buSzPts val="1800"/>
-              <a:buFont typeface="Wingdings" panose="05000000000000000000" charset="0"/>
-              <a:buChar char="q"/>
-            </a:pPr>
-            <a:r>
-              <a:rPr lang="en-US" altLang="en-GB" sz="2000">
-                <a:solidFill>
-                  <a:schemeClr val="bg1"/>
-                </a:solidFill>
-                <a:latin typeface="Comic Sans MS" panose="030F0702030302020204" charset="0"/>
-                <a:cs typeface="Comic Sans MS" panose="030F0702030302020204" charset="0"/>
-                <a:sym typeface="+mn-ea"/>
-              </a:rPr>
-              <a:t> Results and Discussion</a:t>
-            </a:r>
-            <a:endParaRPr lang="en-US" altLang="en-GB" sz="2000">
-              <a:solidFill>
-                <a:schemeClr val="bg1"/>
-              </a:solidFill>
-              <a:latin typeface="Comic Sans MS" panose="030F0702030302020204" charset="0"/>
-              <a:cs typeface="Comic Sans MS" panose="030F0702030302020204" charset="0"/>
-            </a:endParaRPr>
-          </a:p>
-          <a:p>
-            <a:pPr lvl="0" algn="l" rtl="0">
-              <a:lnSpc>
-                <a:spcPct val="150000"/>
-              </a:lnSpc>
-              <a:spcBef>
-                <a:spcPts val="360"/>
-              </a:spcBef>
-              <a:spcAft>
-                <a:spcPts val="0"/>
-              </a:spcAft>
-              <a:buClr>
-                <a:srgbClr val="FFFFFF"/>
-              </a:buClr>
-              <a:buSzPts val="1800"/>
-              <a:buFont typeface="Wingdings" panose="05000000000000000000" charset="0"/>
-              <a:buChar char="q"/>
-            </a:pPr>
-            <a:r>
-              <a:rPr lang="en-US" altLang="en-GB" sz="2000">
-                <a:solidFill>
-                  <a:schemeClr val="bg1"/>
-                </a:solidFill>
-                <a:latin typeface="Comic Sans MS" panose="030F0702030302020204" charset="0"/>
-                <a:cs typeface="Comic Sans MS" panose="030F0702030302020204" charset="0"/>
-                <a:sym typeface="+mn-ea"/>
-              </a:rPr>
-              <a:t> Reference Links</a:t>
-            </a:r>
-            <a:endParaRPr lang="en-US" altLang="en-GB" sz="2000">
-              <a:solidFill>
-                <a:schemeClr val="bg1"/>
-              </a:solidFill>
-              <a:latin typeface="Comic Sans MS" panose="030F0702030302020204" charset="0"/>
-              <a:cs typeface="Comic Sans MS" panose="030F0702030302020204" charset="0"/>
-            </a:endParaRPr>
-          </a:p>
-          <a:p>
-            <a:pPr marL="0" indent="0">
-              <a:buClr>
-                <a:srgbClr val="FFFFFF"/>
-              </a:buClr>
-              <a:buFont typeface="Wingdings" panose="05000000000000000000" charset="0"/>
-              <a:buChar char="q"/>
-            </a:pPr>
-            <a:endParaRPr lang="en-US" altLang="en-GB" sz="2000">
-              <a:solidFill>
-                <a:schemeClr val="bg1"/>
-              </a:solidFill>
-              <a:latin typeface="Comic Sans MS" panose="030F0702030302020204" charset="0"/>
-              <a:cs typeface="Comic Sans MS" panose="030F0702030302020204" charset="0"/>
-            </a:endParaRPr>
-          </a:p>
-        </p:txBody>
-      </p:sp>
-    </p:spTree>
-  </p:cSld>
-  <p:clrMapOvr>
-    <a:masterClrMapping/>
-  </p:clrMapOvr>
-</p:sld>
-</file>
-
 <file path=ppt/slides/slide3.xml><?xml version="1.0" encoding="utf-8"?>
 <p:sld xmlns:a="http://schemas.openxmlformats.org/drawingml/2006/main" xmlns:r="http://schemas.openxmlformats.org/officeDocument/2006/relationships" xmlns:p="http://schemas.openxmlformats.org/presentationml/2006/main">
   <p:cSld>
@@ -10893,8 +11943,8 @@
         </p:nvSpPr>
         <p:spPr>
           <a:xfrm>
-            <a:off x="793150" y="212383"/>
-            <a:ext cx="6408600" cy="637500"/>
+            <a:off x="483870" y="212090"/>
+            <a:ext cx="8430260" cy="637540"/>
           </a:xfrm>
           <a:prstGeom prst="rect">
             <a:avLst/>
@@ -10906,7 +11956,7 @@
           </a:bodyPr>
           <a:lstStyle/>
           <a:p>
-            <a:pPr marL="0" lvl="0" indent="0" algn="l" rtl="0">
+            <a:pPr marL="0" lvl="0" indent="0" algn="ctr" rtl="0">
               <a:spcBef>
                 <a:spcPts val="0"/>
               </a:spcBef>
@@ -10979,7 +12029,7 @@
                 <a:cs typeface="Open Sans" panose="020B0606030504020204" pitchFamily="34" charset="0"/>
                 <a:sym typeface="+mn-ea"/>
               </a:rPr>
-              <a:t>A hospital management system (HMS) is a comprehensive software solution designed to streamline and automate various administrative, clinical, and financial processes within a healthcare facility.</a:t>
+              <a:t>A Hospital Management System (HMS) is a comprehensive software solution designed to streamline and automate various administrative, clinical, and financial processes within a healthcare facility.</a:t>
             </a:r>
             <a:endParaRPr lang="en-US" sz="1800" dirty="0">
               <a:latin typeface="Comic Sans MS" panose="030F0702030302020204" charset="0"/>
@@ -11075,8 +12125,8 @@
         </p:nvSpPr>
         <p:spPr>
           <a:xfrm>
-            <a:off x="793150" y="212383"/>
-            <a:ext cx="6408600" cy="637500"/>
+            <a:off x="485140" y="212090"/>
+            <a:ext cx="8428990" cy="637540"/>
           </a:xfrm>
           <a:prstGeom prst="rect">
             <a:avLst/>
@@ -11088,7 +12138,7 @@
           </a:bodyPr>
           <a:lstStyle/>
           <a:p>
-            <a:pPr marL="0" lvl="0" indent="0" algn="l" rtl="0">
+            <a:pPr marL="0" lvl="0" indent="0" algn="ctr" rtl="0">
               <a:spcBef>
                 <a:spcPts val="0"/>
               </a:spcBef>
@@ -11414,7 +12464,7 @@
           </a:bodyPr>
           <a:lstStyle/>
           <a:p>
-            <a:pPr marL="0" lvl="0" indent="0" algn="l" rtl="0">
+            <a:pPr marL="0" lvl="0" indent="0" algn="ctr" rtl="0">
               <a:spcBef>
                 <a:spcPts val="0"/>
               </a:spcBef>
@@ -11652,7 +12702,7 @@
           </a:bodyPr>
           <a:lstStyle/>
           <a:p>
-            <a:pPr marL="0" lvl="0" indent="0" algn="l" rtl="0">
+            <a:pPr marL="0" lvl="0" indent="0" algn="ctr" rtl="0">
               <a:spcBef>
                 <a:spcPts val="0"/>
               </a:spcBef>
@@ -11857,8 +12907,8 @@
         </p:nvSpPr>
         <p:spPr>
           <a:xfrm>
-            <a:off x="793150" y="212383"/>
-            <a:ext cx="6408600" cy="637500"/>
+            <a:off x="485140" y="212090"/>
+            <a:ext cx="8427720" cy="637540"/>
           </a:xfrm>
           <a:prstGeom prst="rect">
             <a:avLst/>
@@ -11870,7 +12920,7 @@
           </a:bodyPr>
           <a:lstStyle/>
           <a:p>
-            <a:pPr marL="0" lvl="0" indent="0" algn="l" rtl="0">
+            <a:pPr marL="0" lvl="0" indent="0" algn="ctr" rtl="0">
               <a:spcBef>
                 <a:spcPts val="0"/>
               </a:spcBef>
@@ -11907,8 +12957,8 @@
         </p:nvSpPr>
         <p:spPr>
           <a:xfrm>
-            <a:off x="484505" y="1527175"/>
-            <a:ext cx="8428990" cy="2794000"/>
+            <a:off x="484505" y="1056005"/>
+            <a:ext cx="8428990" cy="3935730"/>
           </a:xfrm>
           <a:prstGeom prst="rect">
             <a:avLst/>
@@ -11922,7 +12972,7 @@
           <a:p>
             <a:pPr marL="0" lvl="0" indent="0" algn="just" rtl="0">
               <a:lnSpc>
-                <a:spcPct val="100000"/>
+                <a:spcPct val="110000"/>
               </a:lnSpc>
               <a:spcBef>
                 <a:spcPts val="0"/>
@@ -11934,15 +12984,15 @@
               <a:buNone/>
             </a:pPr>
             <a:r>
-              <a:rPr lang="en-US" sz="1800" b="0" dirty="0">
+              <a:rPr lang="en-US" altLang="en-US" sz="1800" b="0" dirty="0">
                 <a:latin typeface="Comic Sans MS" panose="030F0702030302020204" charset="0"/>
                 <a:ea typeface="Open Sans" panose="020B0606030504020204" pitchFamily="34" charset="0"/>
                 <a:cs typeface="Open Sans" panose="020B0606030504020204" pitchFamily="34" charset="0"/>
                 <a:sym typeface="+mn-ea"/>
               </a:rPr>
-              <a:t>Ineffective manual processes in hospitals lead to mistakes, increased waiting times, and operational obstacles, affecting appointment management, medication tracking, and inventory control. Doctors struggle with resource management, while patients face difficulties in scheduling appointments and accessing medical records. Hospital administrators are burdened with manual tasks, impacting patient care quality and operational efficiency. Therefore, a comprehensive, web-based Hospital Management System (HMS) using the MERN stack is essential to automate key functions, improve efficiency, and enhance patient care while ensuring data security and scalability.</a:t>
+              <a:t>Manual inefficiencies that the hospitals routinely adopt to handle appointments, medications, and inventories result in errors, delay time, and hindrances to business. Hospital management is busy doing manual tracking of inventory and schedules of physicians and hence doesn't utilize resources properly. These problems adversely affect the quality of patient care and operational efficiency. Thus, there is a requirement for an automated, centralized, and user-friendly system to solve these problems. Thus, to operate hospitals efficiently is a feature-rich, web-based Hospital Management System (HMS) based on cutting-edge software technologies like MERN Stack, which help in automating hospital's key functions, makes working more efficient, ensures better and secure patient care, and scalability.</a:t>
             </a:r>
-            <a:endParaRPr lang="en-US" sz="1800" b="0" dirty="0">
+            <a:endParaRPr lang="en-US" altLang="en-US" sz="1800" b="0" dirty="0">
               <a:latin typeface="Comic Sans MS" panose="030F0702030302020204" charset="0"/>
               <a:ea typeface="Open Sans" panose="020B0606030504020204" pitchFamily="34" charset="0"/>
               <a:cs typeface="Open Sans" panose="020B0606030504020204" pitchFamily="34" charset="0"/>
@@ -11997,8 +13047,8 @@
         </p:nvSpPr>
         <p:spPr>
           <a:xfrm>
-            <a:off x="263525" y="212090"/>
-            <a:ext cx="6938010" cy="637540"/>
+            <a:off x="246380" y="97790"/>
+            <a:ext cx="8804275" cy="673735"/>
           </a:xfrm>
           <a:prstGeom prst="rect">
             <a:avLst/>
@@ -12010,7 +13060,7 @@
           </a:bodyPr>
           <a:lstStyle/>
           <a:p>
-            <a:pPr marL="0" lvl="0" indent="0" algn="l" rtl="0">
+            <a:pPr marL="0" lvl="0" indent="0" algn="ctr" rtl="0">
               <a:spcBef>
                 <a:spcPts val="0"/>
               </a:spcBef>
@@ -12020,15 +13070,15 @@
               <a:buNone/>
             </a:pPr>
             <a:r>
-              <a:rPr lang="en-US" sz="3400" u="sng">
+              <a:rPr lang="en-US" altLang="en-GB" sz="3400" u="sng">
                 <a:latin typeface="Algerian" panose="04020705040A02060702"/>
                 <a:ea typeface="Algerian" panose="04020705040A02060702"/>
                 <a:cs typeface="Algerian" panose="04020705040A02060702"/>
                 <a:sym typeface="Algerian" panose="04020705040A02060702"/>
               </a:rPr>
-              <a:t>project plan</a:t>
+              <a:t>HARDWARE REQUIREMENTS</a:t>
             </a:r>
-            <a:endParaRPr lang="en-US" sz="3400" u="sng">
+            <a:endParaRPr lang="en-US" altLang="en-GB" sz="3400" u="sng">
               <a:latin typeface="Algerian" panose="04020705040A02060702"/>
               <a:ea typeface="Algerian" panose="04020705040A02060702"/>
               <a:cs typeface="Algerian" panose="04020705040A02060702"/>
@@ -12047,8 +13097,8 @@
         </p:nvSpPr>
         <p:spPr>
           <a:xfrm>
-            <a:off x="263525" y="1035685"/>
-            <a:ext cx="8649970" cy="3898265"/>
+            <a:off x="107315" y="1092835"/>
+            <a:ext cx="8943975" cy="3992245"/>
           </a:xfrm>
           <a:prstGeom prst="rect">
             <a:avLst/>
@@ -12060,243 +13110,192 @@
           </a:bodyPr>
           <a:lstStyle/>
           <a:p>
-            <a:pPr marL="285750" lvl="0" indent="-285750" algn="just" rtl="0">
+            <a:pPr lvl="0" algn="l" rtl="0">
               <a:lnSpc>
                 <a:spcPct val="150000"/>
               </a:lnSpc>
               <a:spcBef>
-                <a:spcPts val="0"/>
-              </a:spcBef>
-              <a:spcAft>
-                <a:spcPts val="0"/>
-              </a:spcAft>
+                <a:spcPts val="360"/>
+              </a:spcBef>
+              <a:spcAft>
+                <a:spcPts val="0"/>
+              </a:spcAft>
+              <a:buSzPts val="1800"/>
               <a:buFont typeface="Wingdings" panose="05000000000000000000" charset="0"/>
               <a:buChar char="q"/>
             </a:pPr>
             <a:r>
-              <a:rPr lang="en-US" sz="1800" b="0" dirty="0">
+              <a:rPr lang="en-US" sz="1800">
                 <a:latin typeface="Comic Sans MS" panose="030F0702030302020204" charset="0"/>
-                <a:ea typeface="Open Sans" panose="020B0606030504020204" pitchFamily="34" charset="0"/>
-                <a:cs typeface="Open Sans" panose="020B0606030504020204" pitchFamily="34" charset="0"/>
-                <a:sym typeface="+mn-ea"/>
+                <a:cs typeface="Comic Sans MS" panose="030F0702030302020204" charset="0"/>
               </a:rPr>
-              <a:t>Phase 1: Project planning and brainstorming (July)</a:t>
+              <a:t>OS - Windows/ Linux</a:t>
             </a:r>
-            <a:endParaRPr lang="en-US" sz="1800" b="0" dirty="0">
+            <a:endParaRPr lang="en-US" sz="1800">
               <a:latin typeface="Comic Sans MS" panose="030F0702030302020204" charset="0"/>
-              <a:ea typeface="Open Sans" panose="020B0606030504020204" pitchFamily="34" charset="0"/>
-              <a:cs typeface="Open Sans" panose="020B0606030504020204" pitchFamily="34" charset="0"/>
-              <a:sym typeface="+mn-ea"/>
+              <a:cs typeface="Comic Sans MS" panose="030F0702030302020204" charset="0"/>
             </a:endParaRPr>
           </a:p>
           <a:p>
-            <a:pPr marL="285750" lvl="0" indent="-285750" algn="just" rtl="0">
+            <a:pPr lvl="0" algn="l" rtl="0">
               <a:lnSpc>
                 <a:spcPct val="150000"/>
               </a:lnSpc>
               <a:spcBef>
-                <a:spcPts val="0"/>
-              </a:spcBef>
-              <a:spcAft>
-                <a:spcPts val="0"/>
-              </a:spcAft>
+                <a:spcPts val="360"/>
+              </a:spcBef>
+              <a:spcAft>
+                <a:spcPts val="0"/>
+              </a:spcAft>
+              <a:buSzPts val="1800"/>
               <a:buFont typeface="Wingdings" panose="05000000000000000000" charset="0"/>
               <a:buChar char="q"/>
             </a:pPr>
             <a:r>
-              <a:rPr lang="en-US" sz="1800" b="0" dirty="0">
+              <a:rPr lang="en-US" sz="1800">
                 <a:latin typeface="Comic Sans MS" panose="030F0702030302020204" charset="0"/>
-                <a:ea typeface="Open Sans" panose="020B0606030504020204" pitchFamily="34" charset="0"/>
-                <a:cs typeface="Open Sans" panose="020B0606030504020204" pitchFamily="34" charset="0"/>
-                <a:sym typeface="+mn-ea"/>
+                <a:cs typeface="Comic Sans MS" panose="030F0702030302020204" charset="0"/>
               </a:rPr>
-              <a:t>Phase 2: Review 0 and Literature Survey (August)</a:t>
+              <a:t>Execute instructions - Central processing unit (CPU)</a:t>
             </a:r>
-            <a:endParaRPr lang="en-US" sz="1800" b="0" dirty="0">
+            <a:endParaRPr lang="en-US" sz="1800">
               <a:latin typeface="Comic Sans MS" panose="030F0702030302020204" charset="0"/>
-              <a:ea typeface="Open Sans" panose="020B0606030504020204" pitchFamily="34" charset="0"/>
-              <a:cs typeface="Open Sans" panose="020B0606030504020204" pitchFamily="34" charset="0"/>
-              <a:sym typeface="+mn-ea"/>
+              <a:cs typeface="Comic Sans MS" panose="030F0702030302020204" charset="0"/>
             </a:endParaRPr>
           </a:p>
           <a:p>
-            <a:pPr marL="285750" lvl="0" indent="-285750" algn="just" rtl="0">
+            <a:pPr lvl="0" algn="l" rtl="0">
               <a:lnSpc>
                 <a:spcPct val="150000"/>
               </a:lnSpc>
               <a:spcBef>
-                <a:spcPts val="0"/>
-              </a:spcBef>
-              <a:spcAft>
-                <a:spcPts val="0"/>
-              </a:spcAft>
+                <a:spcPts val="360"/>
+              </a:spcBef>
+              <a:spcAft>
+                <a:spcPts val="0"/>
+              </a:spcAft>
+              <a:buSzPts val="1800"/>
               <a:buFont typeface="Wingdings" panose="05000000000000000000" charset="0"/>
               <a:buChar char="q"/>
             </a:pPr>
             <a:r>
-              <a:rPr lang="en-US" sz="1800" b="0" dirty="0">
+              <a:rPr lang="en-US" sz="1800">
                 <a:latin typeface="Comic Sans MS" panose="030F0702030302020204" charset="0"/>
-                <a:ea typeface="Open Sans" panose="020B0606030504020204" pitchFamily="34" charset="0"/>
-                <a:cs typeface="Open Sans" panose="020B0606030504020204" pitchFamily="34" charset="0"/>
-                <a:sym typeface="+mn-ea"/>
+                <a:cs typeface="Comic Sans MS" panose="030F0702030302020204" charset="0"/>
               </a:rPr>
-              <a:t>Phase 3: Finding gaps in literature survey (September)</a:t>
+              <a:t>Displaying images - Graphics Processing unit (GPU)</a:t>
             </a:r>
-            <a:endParaRPr lang="en-US" sz="1800" b="0" dirty="0">
+            <a:endParaRPr lang="en-US" sz="1800">
               <a:latin typeface="Comic Sans MS" panose="030F0702030302020204" charset="0"/>
-              <a:ea typeface="Open Sans" panose="020B0606030504020204" pitchFamily="34" charset="0"/>
-              <a:cs typeface="Open Sans" panose="020B0606030504020204" pitchFamily="34" charset="0"/>
-              <a:sym typeface="+mn-ea"/>
+              <a:cs typeface="Comic Sans MS" panose="030F0702030302020204" charset="0"/>
             </a:endParaRPr>
           </a:p>
           <a:p>
-            <a:pPr marL="285750" lvl="0" indent="-285750" algn="just" rtl="0">
+            <a:pPr lvl="0" algn="l" rtl="0">
               <a:lnSpc>
                 <a:spcPct val="150000"/>
               </a:lnSpc>
               <a:spcBef>
-                <a:spcPts val="0"/>
-              </a:spcBef>
-              <a:spcAft>
-                <a:spcPts val="0"/>
-              </a:spcAft>
+                <a:spcPts val="360"/>
+              </a:spcBef>
+              <a:spcAft>
+                <a:spcPts val="0"/>
+              </a:spcAft>
+              <a:buSzPts val="1800"/>
               <a:buFont typeface="Wingdings" panose="05000000000000000000" charset="0"/>
               <a:buChar char="q"/>
             </a:pPr>
             <a:r>
-              <a:rPr lang="en-US" sz="1800" b="0" dirty="0">
+              <a:rPr lang="en-US" sz="1800">
                 <a:latin typeface="Comic Sans MS" panose="030F0702030302020204" charset="0"/>
-                <a:ea typeface="Open Sans" panose="020B0606030504020204" pitchFamily="34" charset="0"/>
-                <a:cs typeface="Open Sans" panose="020B0606030504020204" pitchFamily="34" charset="0"/>
-                <a:sym typeface="+mn-ea"/>
+                <a:cs typeface="Comic Sans MS" panose="030F0702030302020204" charset="0"/>
               </a:rPr>
-              <a:t>Phase 4: Proposed Architecture and Review 1 (October)</a:t>
+              <a:t>High storage capacity - Hard Disk Drives (HDD)</a:t>
             </a:r>
-            <a:endParaRPr lang="en-US" sz="1800" b="0" dirty="0">
+            <a:endParaRPr lang="en-US" sz="1800">
               <a:latin typeface="Comic Sans MS" panose="030F0702030302020204" charset="0"/>
-              <a:ea typeface="Open Sans" panose="020B0606030504020204" pitchFamily="34" charset="0"/>
-              <a:cs typeface="Open Sans" panose="020B0606030504020204" pitchFamily="34" charset="0"/>
-              <a:sym typeface="+mn-ea"/>
+              <a:cs typeface="Comic Sans MS" panose="030F0702030302020204" charset="0"/>
             </a:endParaRPr>
           </a:p>
           <a:p>
-            <a:pPr marL="285750" lvl="0" indent="-285750" algn="just" rtl="0">
+            <a:pPr lvl="0" algn="l" rtl="0">
               <a:lnSpc>
                 <a:spcPct val="150000"/>
               </a:lnSpc>
               <a:spcBef>
-                <a:spcPts val="0"/>
-              </a:spcBef>
-              <a:spcAft>
-                <a:spcPts val="0"/>
-              </a:spcAft>
+                <a:spcPts val="360"/>
+              </a:spcBef>
+              <a:spcAft>
+                <a:spcPts val="0"/>
+              </a:spcAft>
+              <a:buSzPts val="1800"/>
               <a:buFont typeface="Wingdings" panose="05000000000000000000" charset="0"/>
               <a:buChar char="q"/>
             </a:pPr>
             <a:r>
-              <a:rPr lang="en-US" sz="1800" b="0" dirty="0">
+              <a:rPr lang="en-US" sz="1800">
                 <a:latin typeface="Comic Sans MS" panose="030F0702030302020204" charset="0"/>
-                <a:ea typeface="Open Sans" panose="020B0606030504020204" pitchFamily="34" charset="0"/>
-                <a:cs typeface="Open Sans" panose="020B0606030504020204" pitchFamily="34" charset="0"/>
-                <a:sym typeface="+mn-ea"/>
+                <a:cs typeface="Comic Sans MS" panose="030F0702030302020204" charset="0"/>
               </a:rPr>
-              <a:t>Phase 5: Installing packages and Frontend Implementation (November)</a:t>
+              <a:t>Temporary Storage - Random Access memory (RAM)</a:t>
             </a:r>
-            <a:endParaRPr lang="en-US" sz="1800" b="0" dirty="0">
+            <a:endParaRPr lang="en-US" sz="1800">
               <a:latin typeface="Comic Sans MS" panose="030F0702030302020204" charset="0"/>
-              <a:ea typeface="Open Sans" panose="020B0606030504020204" pitchFamily="34" charset="0"/>
-              <a:cs typeface="Open Sans" panose="020B0606030504020204" pitchFamily="34" charset="0"/>
-              <a:sym typeface="+mn-ea"/>
+              <a:cs typeface="Comic Sans MS" panose="030F0702030302020204" charset="0"/>
             </a:endParaRPr>
           </a:p>
           <a:p>
-            <a:pPr marL="285750" lvl="0" indent="-285750" algn="just" rtl="0">
+            <a:pPr lvl="0" algn="l" rtl="0">
               <a:lnSpc>
                 <a:spcPct val="150000"/>
               </a:lnSpc>
               <a:spcBef>
-                <a:spcPts val="0"/>
-              </a:spcBef>
-              <a:spcAft>
-                <a:spcPts val="0"/>
-              </a:spcAft>
+                <a:spcPts val="360"/>
+              </a:spcBef>
+              <a:spcAft>
+                <a:spcPts val="0"/>
+              </a:spcAft>
+              <a:buSzPts val="1800"/>
               <a:buFont typeface="Wingdings" panose="05000000000000000000" charset="0"/>
               <a:buChar char="q"/>
             </a:pPr>
             <a:r>
-              <a:rPr lang="en-US" sz="1800" b="0" dirty="0">
+              <a:rPr lang="en-US" sz="1800">
                 <a:latin typeface="Comic Sans MS" panose="030F0702030302020204" charset="0"/>
-                <a:ea typeface="Open Sans" panose="020B0606030504020204" pitchFamily="34" charset="0"/>
-                <a:cs typeface="Open Sans" panose="020B0606030504020204" pitchFamily="34" charset="0"/>
-                <a:sym typeface="+mn-ea"/>
+                <a:cs typeface="Comic Sans MS" panose="030F0702030302020204" charset="0"/>
               </a:rPr>
-              <a:t>Phase 6: Backend Implementation (December)</a:t>
+              <a:t>Device - Laptop/ Computer</a:t>
             </a:r>
-            <a:endParaRPr lang="en-US" sz="1800" b="0" dirty="0">
+            <a:endParaRPr lang="en-US" sz="1800">
               <a:latin typeface="Comic Sans MS" panose="030F0702030302020204" charset="0"/>
-              <a:ea typeface="Open Sans" panose="020B0606030504020204" pitchFamily="34" charset="0"/>
-              <a:cs typeface="Open Sans" panose="020B0606030504020204" pitchFamily="34" charset="0"/>
-              <a:sym typeface="+mn-ea"/>
+              <a:cs typeface="Comic Sans MS" panose="030F0702030302020204" charset="0"/>
             </a:endParaRPr>
           </a:p>
           <a:p>
-            <a:pPr marL="285750" lvl="0" indent="-285750" algn="just" rtl="0">
+            <a:pPr lvl="0" algn="l" rtl="0">
               <a:lnSpc>
                 <a:spcPct val="150000"/>
               </a:lnSpc>
               <a:spcBef>
-                <a:spcPts val="0"/>
-              </a:spcBef>
-              <a:spcAft>
-                <a:spcPts val="0"/>
-              </a:spcAft>
+                <a:spcPts val="360"/>
+              </a:spcBef>
+              <a:spcAft>
+                <a:spcPts val="0"/>
+              </a:spcAft>
+              <a:buSzPts val="1800"/>
               <a:buFont typeface="Wingdings" panose="05000000000000000000" charset="0"/>
               <a:buChar char="q"/>
             </a:pPr>
             <a:r>
-              <a:rPr lang="en-US" sz="1800" b="0" dirty="0">
+              <a:rPr lang="en-US" sz="1800">
                 <a:latin typeface="Comic Sans MS" panose="030F0702030302020204" charset="0"/>
-                <a:ea typeface="Open Sans" panose="020B0606030504020204" pitchFamily="34" charset="0"/>
-                <a:cs typeface="Open Sans" panose="020B0606030504020204" pitchFamily="34" charset="0"/>
-                <a:sym typeface="+mn-ea"/>
+                <a:cs typeface="Comic Sans MS" panose="030F0702030302020204" charset="0"/>
               </a:rPr>
-              <a:t>Phase 7: Review 2 (January)</a:t>
+              <a:t>Processor - Intel Core i5</a:t>
             </a:r>
-            <a:endParaRPr lang="en-US" sz="1800" b="0" dirty="0">
+            <a:endParaRPr lang="en-US" sz="1800">
               <a:latin typeface="Comic Sans MS" panose="030F0702030302020204" charset="0"/>
-              <a:ea typeface="Open Sans" panose="020B0606030504020204" pitchFamily="34" charset="0"/>
-              <a:cs typeface="Open Sans" panose="020B0606030504020204" pitchFamily="34" charset="0"/>
-              <a:sym typeface="+mn-ea"/>
-            </a:endParaRPr>
-          </a:p>
-          <a:p>
-            <a:pPr marL="285750" lvl="0" indent="-285750" algn="just" rtl="0">
-              <a:lnSpc>
-                <a:spcPct val="150000"/>
-              </a:lnSpc>
-              <a:spcBef>
-                <a:spcPts val="0"/>
-              </a:spcBef>
-              <a:spcAft>
-                <a:spcPts val="0"/>
-              </a:spcAft>
-              <a:buFont typeface="Wingdings" panose="05000000000000000000" charset="0"/>
-              <a:buChar char="q"/>
-            </a:pPr>
-            <a:r>
-              <a:rPr lang="en-US" sz="1800" b="0" dirty="0">
-                <a:latin typeface="Comic Sans MS" panose="030F0702030302020204" charset="0"/>
-                <a:ea typeface="Open Sans" panose="020B0606030504020204" pitchFamily="34" charset="0"/>
-                <a:cs typeface="Open Sans" panose="020B0606030504020204" pitchFamily="34" charset="0"/>
-                <a:sym typeface="+mn-ea"/>
-              </a:rPr>
-              <a:t>Final Phase: Review 3 (February)</a:t>
-            </a:r>
-            <a:endParaRPr lang="en-US" sz="1800" b="0" dirty="0">
-              <a:latin typeface="Comic Sans MS" panose="030F0702030302020204" charset="0"/>
-              <a:ea typeface="Open Sans" panose="020B0606030504020204" pitchFamily="34" charset="0"/>
-              <a:cs typeface="Open Sans" panose="020B0606030504020204" pitchFamily="34" charset="0"/>
-              <a:sym typeface="+mn-ea"/>
+              <a:cs typeface="Comic Sans MS" panose="030F0702030302020204" charset="0"/>
             </a:endParaRPr>
           </a:p>
         </p:txBody>
